--- a/Introduction to Fortran Slides.pptx
+++ b/Introduction to Fortran Slides.pptx
@@ -178,1510 +178,74 @@
 </p:presentation>
 </file>
 
-<file path=ppt/revisionInfo.xml><?xml version="1.0" encoding="utf-8"?>
-<p1510:revInfo xmlns:a="http://schemas.openxmlformats.org/drawingml/2006/main" xmlns:r="http://schemas.openxmlformats.org/officeDocument/2006/relationships" xmlns:p1510="http://schemas.microsoft.com/office/powerpoint/2015/10/main">
-  <p1510:revLst>
-    <p1510:client id="{F87168F7-E426-4E0C-B927-43E350A0E028}" v="3" dt="2025-10-24T08:50:32.643"/>
-  </p1510:revLst>
-</p1510:revInfo>
-</file>
-
 <file path=ppt/changesInfos/changesInfo1.xml><?xml version="1.0" encoding="utf-8"?>
 <pc:chgInfo xmlns:a="http://schemas.openxmlformats.org/drawingml/2006/main" xmlns:r="http://schemas.openxmlformats.org/officeDocument/2006/relationships" xmlns:ac="http://schemas.microsoft.com/office/drawing/2013/main/command" xmlns:pc="http://schemas.microsoft.com/office/powerpoint/2013/main/command">
   <pc:docChgLst>
-    <pc:chgData name="Cooling, Chris" userId="6dcf99c9-2ba5-410a-8445-0893a3d1421f" providerId="ADAL" clId="{03CF33AC-D9E4-491F-8963-DAB5E6081A01}"/>
-    <pc:docChg chg="undo custSel addSld delSld modSld sldOrd">
-      <pc:chgData name="Cooling, Chris" userId="6dcf99c9-2ba5-410a-8445-0893a3d1421f" providerId="ADAL" clId="{03CF33AC-D9E4-491F-8963-DAB5E6081A01}" dt="2024-10-16T09:09:29.452" v="4301" actId="20577"/>
+    <pc:chgData name="Cooling, Chris" userId="6dcf99c9-2ba5-410a-8445-0893a3d1421f" providerId="ADAL" clId="{0564427D-CD1D-4B33-9C97-2A8069F97102}"/>
+    <pc:docChg chg="modSld">
+      <pc:chgData name="Cooling, Chris" userId="6dcf99c9-2ba5-410a-8445-0893a3d1421f" providerId="ADAL" clId="{0564427D-CD1D-4B33-9C97-2A8069F97102}" dt="2026-05-29T10:54:56.157" v="16" actId="20577"/>
       <pc:docMkLst>
         <pc:docMk/>
       </pc:docMkLst>
-      <pc:sldChg chg="del">
-        <pc:chgData name="Cooling, Chris" userId="6dcf99c9-2ba5-410a-8445-0893a3d1421f" providerId="ADAL" clId="{03CF33AC-D9E4-491F-8963-DAB5E6081A01}" dt="2024-10-07T10:01:12.048" v="12" actId="47"/>
-        <pc:sldMkLst>
-          <pc:docMk/>
-          <pc:sldMk cId="2509046592" sldId="260"/>
-        </pc:sldMkLst>
-      </pc:sldChg>
-      <pc:sldChg chg="del">
-        <pc:chgData name="Cooling, Chris" userId="6dcf99c9-2ba5-410a-8445-0893a3d1421f" providerId="ADAL" clId="{03CF33AC-D9E4-491F-8963-DAB5E6081A01}" dt="2024-10-07T10:01:12.048" v="12" actId="47"/>
-        <pc:sldMkLst>
-          <pc:docMk/>
-          <pc:sldMk cId="2440717809" sldId="262"/>
-        </pc:sldMkLst>
-      </pc:sldChg>
-      <pc:sldChg chg="del">
-        <pc:chgData name="Cooling, Chris" userId="6dcf99c9-2ba5-410a-8445-0893a3d1421f" providerId="ADAL" clId="{03CF33AC-D9E4-491F-8963-DAB5E6081A01}" dt="2024-10-07T10:01:12.048" v="12" actId="47"/>
-        <pc:sldMkLst>
-          <pc:docMk/>
-          <pc:sldMk cId="4280908608" sldId="263"/>
-        </pc:sldMkLst>
-      </pc:sldChg>
-      <pc:sldChg chg="del">
-        <pc:chgData name="Cooling, Chris" userId="6dcf99c9-2ba5-410a-8445-0893a3d1421f" providerId="ADAL" clId="{03CF33AC-D9E4-491F-8963-DAB5E6081A01}" dt="2024-10-07T10:01:12.048" v="12" actId="47"/>
-        <pc:sldMkLst>
-          <pc:docMk/>
-          <pc:sldMk cId="892137174" sldId="264"/>
-        </pc:sldMkLst>
-      </pc:sldChg>
-      <pc:sldChg chg="del">
-        <pc:chgData name="Cooling, Chris" userId="6dcf99c9-2ba5-410a-8445-0893a3d1421f" providerId="ADAL" clId="{03CF33AC-D9E4-491F-8963-DAB5E6081A01}" dt="2024-10-07T10:01:12.048" v="12" actId="47"/>
-        <pc:sldMkLst>
-          <pc:docMk/>
-          <pc:sldMk cId="3657803416" sldId="265"/>
-        </pc:sldMkLst>
-      </pc:sldChg>
-      <pc:sldChg chg="del">
-        <pc:chgData name="Cooling, Chris" userId="6dcf99c9-2ba5-410a-8445-0893a3d1421f" providerId="ADAL" clId="{03CF33AC-D9E4-491F-8963-DAB5E6081A01}" dt="2024-10-07T10:01:12.048" v="12" actId="47"/>
-        <pc:sldMkLst>
-          <pc:docMk/>
-          <pc:sldMk cId="1090473929" sldId="266"/>
-        </pc:sldMkLst>
-      </pc:sldChg>
-      <pc:sldChg chg="del">
-        <pc:chgData name="Cooling, Chris" userId="6dcf99c9-2ba5-410a-8445-0893a3d1421f" providerId="ADAL" clId="{03CF33AC-D9E4-491F-8963-DAB5E6081A01}" dt="2024-10-07T10:01:12.048" v="12" actId="47"/>
-        <pc:sldMkLst>
-          <pc:docMk/>
-          <pc:sldMk cId="2899002451" sldId="267"/>
-        </pc:sldMkLst>
-      </pc:sldChg>
-      <pc:sldChg chg="del">
-        <pc:chgData name="Cooling, Chris" userId="6dcf99c9-2ba5-410a-8445-0893a3d1421f" providerId="ADAL" clId="{03CF33AC-D9E4-491F-8963-DAB5E6081A01}" dt="2024-10-07T10:01:12.048" v="12" actId="47"/>
-        <pc:sldMkLst>
-          <pc:docMk/>
-          <pc:sldMk cId="219240684" sldId="268"/>
-        </pc:sldMkLst>
-      </pc:sldChg>
-      <pc:sldChg chg="del">
-        <pc:chgData name="Cooling, Chris" userId="6dcf99c9-2ba5-410a-8445-0893a3d1421f" providerId="ADAL" clId="{03CF33AC-D9E4-491F-8963-DAB5E6081A01}" dt="2024-10-07T10:01:12.048" v="12" actId="47"/>
-        <pc:sldMkLst>
-          <pc:docMk/>
-          <pc:sldMk cId="1591646720" sldId="269"/>
-        </pc:sldMkLst>
-      </pc:sldChg>
-      <pc:sldChg chg="del">
-        <pc:chgData name="Cooling, Chris" userId="6dcf99c9-2ba5-410a-8445-0893a3d1421f" providerId="ADAL" clId="{03CF33AC-D9E4-491F-8963-DAB5E6081A01}" dt="2024-10-07T10:01:12.048" v="12" actId="47"/>
-        <pc:sldMkLst>
-          <pc:docMk/>
-          <pc:sldMk cId="3902907092" sldId="270"/>
-        </pc:sldMkLst>
-      </pc:sldChg>
-      <pc:sldChg chg="del">
-        <pc:chgData name="Cooling, Chris" userId="6dcf99c9-2ba5-410a-8445-0893a3d1421f" providerId="ADAL" clId="{03CF33AC-D9E4-491F-8963-DAB5E6081A01}" dt="2024-10-07T10:01:12.048" v="12" actId="47"/>
-        <pc:sldMkLst>
-          <pc:docMk/>
-          <pc:sldMk cId="549157250" sldId="271"/>
-        </pc:sldMkLst>
-      </pc:sldChg>
-      <pc:sldChg chg="del">
-        <pc:chgData name="Cooling, Chris" userId="6dcf99c9-2ba5-410a-8445-0893a3d1421f" providerId="ADAL" clId="{03CF33AC-D9E4-491F-8963-DAB5E6081A01}" dt="2024-10-07T10:01:12.048" v="12" actId="47"/>
-        <pc:sldMkLst>
-          <pc:docMk/>
-          <pc:sldMk cId="260365935" sldId="273"/>
-        </pc:sldMkLst>
-      </pc:sldChg>
-      <pc:sldChg chg="del">
-        <pc:chgData name="Cooling, Chris" userId="6dcf99c9-2ba5-410a-8445-0893a3d1421f" providerId="ADAL" clId="{03CF33AC-D9E4-491F-8963-DAB5E6081A01}" dt="2024-10-07T10:01:23.237" v="13" actId="47"/>
-        <pc:sldMkLst>
-          <pc:docMk/>
-          <pc:sldMk cId="1031427888" sldId="276"/>
-        </pc:sldMkLst>
-      </pc:sldChg>
-      <pc:sldChg chg="addSp modSp add del mod modClrScheme chgLayout">
-        <pc:chgData name="Cooling, Chris" userId="6dcf99c9-2ba5-410a-8445-0893a3d1421f" providerId="ADAL" clId="{03CF33AC-D9E4-491F-8963-DAB5E6081A01}" dt="2024-10-09T08:24:54.016" v="77"/>
-        <pc:sldMkLst>
-          <pc:docMk/>
-          <pc:sldMk cId="3227858941" sldId="281"/>
-        </pc:sldMkLst>
-      </pc:sldChg>
-      <pc:sldChg chg="modSp add del mod">
-        <pc:chgData name="Cooling, Chris" userId="6dcf99c9-2ba5-410a-8445-0893a3d1421f" providerId="ADAL" clId="{03CF33AC-D9E4-491F-8963-DAB5E6081A01}" dt="2024-10-09T08:24:54.016" v="77"/>
-        <pc:sldMkLst>
-          <pc:docMk/>
-          <pc:sldMk cId="766773942" sldId="282"/>
-        </pc:sldMkLst>
-      </pc:sldChg>
-      <pc:sldChg chg="modSp add del mod">
-        <pc:chgData name="Cooling, Chris" userId="6dcf99c9-2ba5-410a-8445-0893a3d1421f" providerId="ADAL" clId="{03CF33AC-D9E4-491F-8963-DAB5E6081A01}" dt="2024-10-09T08:24:54.016" v="77"/>
-        <pc:sldMkLst>
-          <pc:docMk/>
-          <pc:sldMk cId="812463129" sldId="283"/>
-        </pc:sldMkLst>
-      </pc:sldChg>
-      <pc:sldChg chg="add del">
-        <pc:chgData name="Cooling, Chris" userId="6dcf99c9-2ba5-410a-8445-0893a3d1421f" providerId="ADAL" clId="{03CF33AC-D9E4-491F-8963-DAB5E6081A01}" dt="2024-10-09T08:24:54.016" v="77"/>
-        <pc:sldMkLst>
-          <pc:docMk/>
-          <pc:sldMk cId="2428056926" sldId="284"/>
-        </pc:sldMkLst>
-      </pc:sldChg>
-      <pc:sldChg chg="add del">
-        <pc:chgData name="Cooling, Chris" userId="6dcf99c9-2ba5-410a-8445-0893a3d1421f" providerId="ADAL" clId="{03CF33AC-D9E4-491F-8963-DAB5E6081A01}" dt="2024-10-09T08:24:54.016" v="77"/>
-        <pc:sldMkLst>
-          <pc:docMk/>
-          <pc:sldMk cId="735192102" sldId="285"/>
-        </pc:sldMkLst>
-      </pc:sldChg>
-      <pc:sldChg chg="del">
-        <pc:chgData name="Cooling, Chris" userId="6dcf99c9-2ba5-410a-8445-0893a3d1421f" providerId="ADAL" clId="{03CF33AC-D9E4-491F-8963-DAB5E6081A01}" dt="2024-10-07T10:01:12.048" v="12" actId="47"/>
-        <pc:sldMkLst>
-          <pc:docMk/>
-          <pc:sldMk cId="1961674838" sldId="286"/>
-        </pc:sldMkLst>
-      </pc:sldChg>
-      <pc:sldChg chg="add del">
-        <pc:chgData name="Cooling, Chris" userId="6dcf99c9-2ba5-410a-8445-0893a3d1421f" providerId="ADAL" clId="{03CF33AC-D9E4-491F-8963-DAB5E6081A01}" dt="2024-10-09T08:24:54.016" v="77"/>
-        <pc:sldMkLst>
-          <pc:docMk/>
-          <pc:sldMk cId="3966698890" sldId="286"/>
-        </pc:sldMkLst>
-      </pc:sldChg>
-      <pc:sldChg chg="add del">
-        <pc:chgData name="Cooling, Chris" userId="6dcf99c9-2ba5-410a-8445-0893a3d1421f" providerId="ADAL" clId="{03CF33AC-D9E4-491F-8963-DAB5E6081A01}" dt="2024-10-09T08:24:54.016" v="77"/>
-        <pc:sldMkLst>
-          <pc:docMk/>
-          <pc:sldMk cId="3168009626" sldId="287"/>
-        </pc:sldMkLst>
-      </pc:sldChg>
-      <pc:sldChg chg="add del">
-        <pc:chgData name="Cooling, Chris" userId="6dcf99c9-2ba5-410a-8445-0893a3d1421f" providerId="ADAL" clId="{03CF33AC-D9E4-491F-8963-DAB5E6081A01}" dt="2024-10-09T08:24:54.016" v="77"/>
-        <pc:sldMkLst>
-          <pc:docMk/>
-          <pc:sldMk cId="746547034" sldId="288"/>
-        </pc:sldMkLst>
-      </pc:sldChg>
-      <pc:sldChg chg="del">
-        <pc:chgData name="Cooling, Chris" userId="6dcf99c9-2ba5-410a-8445-0893a3d1421f" providerId="ADAL" clId="{03CF33AC-D9E4-491F-8963-DAB5E6081A01}" dt="2024-10-07T10:01:12.048" v="12" actId="47"/>
-        <pc:sldMkLst>
-          <pc:docMk/>
-          <pc:sldMk cId="3543483350" sldId="288"/>
-        </pc:sldMkLst>
-      </pc:sldChg>
-      <pc:sldChg chg="add del">
-        <pc:chgData name="Cooling, Chris" userId="6dcf99c9-2ba5-410a-8445-0893a3d1421f" providerId="ADAL" clId="{03CF33AC-D9E4-491F-8963-DAB5E6081A01}" dt="2024-10-09T08:24:54.016" v="77"/>
-        <pc:sldMkLst>
-          <pc:docMk/>
-          <pc:sldMk cId="2053716256" sldId="289"/>
-        </pc:sldMkLst>
-      </pc:sldChg>
-      <pc:sldChg chg="del">
-        <pc:chgData name="Cooling, Chris" userId="6dcf99c9-2ba5-410a-8445-0893a3d1421f" providerId="ADAL" clId="{03CF33AC-D9E4-491F-8963-DAB5E6081A01}" dt="2024-10-07T10:01:12.048" v="12" actId="47"/>
-        <pc:sldMkLst>
-          <pc:docMk/>
-          <pc:sldMk cId="4077175788" sldId="289"/>
-        </pc:sldMkLst>
-      </pc:sldChg>
-      <pc:sldChg chg="modSp add del mod">
-        <pc:chgData name="Cooling, Chris" userId="6dcf99c9-2ba5-410a-8445-0893a3d1421f" providerId="ADAL" clId="{03CF33AC-D9E4-491F-8963-DAB5E6081A01}" dt="2024-10-09T08:24:54.016" v="77"/>
-        <pc:sldMkLst>
-          <pc:docMk/>
-          <pc:sldMk cId="3140181227" sldId="292"/>
-        </pc:sldMkLst>
-      </pc:sldChg>
-      <pc:sldChg chg="del">
-        <pc:chgData name="Cooling, Chris" userId="6dcf99c9-2ba5-410a-8445-0893a3d1421f" providerId="ADAL" clId="{03CF33AC-D9E4-491F-8963-DAB5E6081A01}" dt="2024-10-07T10:01:12.048" v="12" actId="47"/>
-        <pc:sldMkLst>
-          <pc:docMk/>
-          <pc:sldMk cId="2602109094" sldId="293"/>
-        </pc:sldMkLst>
-      </pc:sldChg>
-      <pc:sldChg chg="del">
-        <pc:chgData name="Cooling, Chris" userId="6dcf99c9-2ba5-410a-8445-0893a3d1421f" providerId="ADAL" clId="{03CF33AC-D9E4-491F-8963-DAB5E6081A01}" dt="2024-10-07T10:01:12.048" v="12" actId="47"/>
-        <pc:sldMkLst>
-          <pc:docMk/>
-          <pc:sldMk cId="624633227" sldId="294"/>
-        </pc:sldMkLst>
-      </pc:sldChg>
-      <pc:sldChg chg="add del">
-        <pc:chgData name="Cooling, Chris" userId="6dcf99c9-2ba5-410a-8445-0893a3d1421f" providerId="ADAL" clId="{03CF33AC-D9E4-491F-8963-DAB5E6081A01}" dt="2024-10-09T08:24:54.016" v="77"/>
-        <pc:sldMkLst>
-          <pc:docMk/>
-          <pc:sldMk cId="2454815734" sldId="294"/>
-        </pc:sldMkLst>
-      </pc:sldChg>
-      <pc:sldChg chg="del">
-        <pc:chgData name="Cooling, Chris" userId="6dcf99c9-2ba5-410a-8445-0893a3d1421f" providerId="ADAL" clId="{03CF33AC-D9E4-491F-8963-DAB5E6081A01}" dt="2024-10-07T10:01:12.048" v="12" actId="47"/>
-        <pc:sldMkLst>
-          <pc:docMk/>
-          <pc:sldMk cId="3031389964" sldId="295"/>
-        </pc:sldMkLst>
-      </pc:sldChg>
-      <pc:sldChg chg="add del">
-        <pc:chgData name="Cooling, Chris" userId="6dcf99c9-2ba5-410a-8445-0893a3d1421f" providerId="ADAL" clId="{03CF33AC-D9E4-491F-8963-DAB5E6081A01}" dt="2024-10-09T08:24:54.016" v="77"/>
-        <pc:sldMkLst>
-          <pc:docMk/>
-          <pc:sldMk cId="3778418652" sldId="295"/>
-        </pc:sldMkLst>
-      </pc:sldChg>
-      <pc:sldChg chg="del">
-        <pc:chgData name="Cooling, Chris" userId="6dcf99c9-2ba5-410a-8445-0893a3d1421f" providerId="ADAL" clId="{03CF33AC-D9E4-491F-8963-DAB5E6081A01}" dt="2024-10-07T10:01:12.048" v="12" actId="47"/>
-        <pc:sldMkLst>
-          <pc:docMk/>
-          <pc:sldMk cId="1470460910" sldId="296"/>
-        </pc:sldMkLst>
-      </pc:sldChg>
-      <pc:sldChg chg="modSp add del mod">
-        <pc:chgData name="Cooling, Chris" userId="6dcf99c9-2ba5-410a-8445-0893a3d1421f" providerId="ADAL" clId="{03CF33AC-D9E4-491F-8963-DAB5E6081A01}" dt="2024-10-09T08:24:54.016" v="77"/>
-        <pc:sldMkLst>
-          <pc:docMk/>
-          <pc:sldMk cId="2849987525" sldId="296"/>
-        </pc:sldMkLst>
-      </pc:sldChg>
-      <pc:sldChg chg="add del">
-        <pc:chgData name="Cooling, Chris" userId="6dcf99c9-2ba5-410a-8445-0893a3d1421f" providerId="ADAL" clId="{03CF33AC-D9E4-491F-8963-DAB5E6081A01}" dt="2024-10-09T08:24:54.016" v="77"/>
-        <pc:sldMkLst>
-          <pc:docMk/>
-          <pc:sldMk cId="2599389758" sldId="297"/>
-        </pc:sldMkLst>
-      </pc:sldChg>
-      <pc:sldChg chg="del">
-        <pc:chgData name="Cooling, Chris" userId="6dcf99c9-2ba5-410a-8445-0893a3d1421f" providerId="ADAL" clId="{03CF33AC-D9E4-491F-8963-DAB5E6081A01}" dt="2024-10-07T10:01:12.048" v="12" actId="47"/>
-        <pc:sldMkLst>
-          <pc:docMk/>
-          <pc:sldMk cId="3329594451" sldId="297"/>
-        </pc:sldMkLst>
-      </pc:sldChg>
-      <pc:sldChg chg="del">
-        <pc:chgData name="Cooling, Chris" userId="6dcf99c9-2ba5-410a-8445-0893a3d1421f" providerId="ADAL" clId="{03CF33AC-D9E4-491F-8963-DAB5E6081A01}" dt="2024-10-07T10:01:12.048" v="12" actId="47"/>
-        <pc:sldMkLst>
-          <pc:docMk/>
-          <pc:sldMk cId="3735834741" sldId="298"/>
-        </pc:sldMkLst>
-      </pc:sldChg>
-      <pc:sldChg chg="del">
-        <pc:chgData name="Cooling, Chris" userId="6dcf99c9-2ba5-410a-8445-0893a3d1421f" providerId="ADAL" clId="{03CF33AC-D9E4-491F-8963-DAB5E6081A01}" dt="2024-10-07T10:01:12.048" v="12" actId="47"/>
-        <pc:sldMkLst>
-          <pc:docMk/>
-          <pc:sldMk cId="559510141" sldId="299"/>
-        </pc:sldMkLst>
-      </pc:sldChg>
-      <pc:sldChg chg="add del">
-        <pc:chgData name="Cooling, Chris" userId="6dcf99c9-2ba5-410a-8445-0893a3d1421f" providerId="ADAL" clId="{03CF33AC-D9E4-491F-8963-DAB5E6081A01}" dt="2024-10-09T08:24:54.016" v="77"/>
-        <pc:sldMkLst>
-          <pc:docMk/>
-          <pc:sldMk cId="3102632955" sldId="299"/>
-        </pc:sldMkLst>
-      </pc:sldChg>
-      <pc:sldChg chg="del">
-        <pc:chgData name="Cooling, Chris" userId="6dcf99c9-2ba5-410a-8445-0893a3d1421f" providerId="ADAL" clId="{03CF33AC-D9E4-491F-8963-DAB5E6081A01}" dt="2024-10-07T10:01:12.048" v="12" actId="47"/>
-        <pc:sldMkLst>
-          <pc:docMk/>
-          <pc:sldMk cId="777092763" sldId="300"/>
-        </pc:sldMkLst>
-      </pc:sldChg>
-      <pc:sldChg chg="modSp add del mod">
-        <pc:chgData name="Cooling, Chris" userId="6dcf99c9-2ba5-410a-8445-0893a3d1421f" providerId="ADAL" clId="{03CF33AC-D9E4-491F-8963-DAB5E6081A01}" dt="2024-10-09T08:24:54.016" v="77"/>
-        <pc:sldMkLst>
-          <pc:docMk/>
-          <pc:sldMk cId="3357951532" sldId="300"/>
-        </pc:sldMkLst>
-      </pc:sldChg>
-      <pc:sldChg chg="add del">
-        <pc:chgData name="Cooling, Chris" userId="6dcf99c9-2ba5-410a-8445-0893a3d1421f" providerId="ADAL" clId="{03CF33AC-D9E4-491F-8963-DAB5E6081A01}" dt="2024-10-09T08:24:54.016" v="77"/>
-        <pc:sldMkLst>
-          <pc:docMk/>
-          <pc:sldMk cId="453738133" sldId="301"/>
-        </pc:sldMkLst>
-      </pc:sldChg>
-      <pc:sldChg chg="add del">
-        <pc:chgData name="Cooling, Chris" userId="6dcf99c9-2ba5-410a-8445-0893a3d1421f" providerId="ADAL" clId="{03CF33AC-D9E4-491F-8963-DAB5E6081A01}" dt="2024-10-09T08:24:54.016" v="77"/>
-        <pc:sldMkLst>
-          <pc:docMk/>
-          <pc:sldMk cId="57580663" sldId="302"/>
-        </pc:sldMkLst>
-      </pc:sldChg>
-      <pc:sldChg chg="del">
-        <pc:chgData name="Cooling, Chris" userId="6dcf99c9-2ba5-410a-8445-0893a3d1421f" providerId="ADAL" clId="{03CF33AC-D9E4-491F-8963-DAB5E6081A01}" dt="2024-10-07T10:01:12.048" v="12" actId="47"/>
-        <pc:sldMkLst>
-          <pc:docMk/>
-          <pc:sldMk cId="2109535584" sldId="303"/>
-        </pc:sldMkLst>
-      </pc:sldChg>
-      <pc:sldChg chg="del">
-        <pc:chgData name="Cooling, Chris" userId="6dcf99c9-2ba5-410a-8445-0893a3d1421f" providerId="ADAL" clId="{03CF33AC-D9E4-491F-8963-DAB5E6081A01}" dt="2024-10-07T10:01:12.048" v="12" actId="47"/>
-        <pc:sldMkLst>
-          <pc:docMk/>
-          <pc:sldMk cId="1963070087" sldId="304"/>
-        </pc:sldMkLst>
-      </pc:sldChg>
-      <pc:sldChg chg="del">
-        <pc:chgData name="Cooling, Chris" userId="6dcf99c9-2ba5-410a-8445-0893a3d1421f" providerId="ADAL" clId="{03CF33AC-D9E4-491F-8963-DAB5E6081A01}" dt="2024-10-07T10:01:12.048" v="12" actId="47"/>
-        <pc:sldMkLst>
-          <pc:docMk/>
-          <pc:sldMk cId="1986365774" sldId="305"/>
-        </pc:sldMkLst>
-      </pc:sldChg>
-      <pc:sldChg chg="add del">
-        <pc:chgData name="Cooling, Chris" userId="6dcf99c9-2ba5-410a-8445-0893a3d1421f" providerId="ADAL" clId="{03CF33AC-D9E4-491F-8963-DAB5E6081A01}" dt="2024-10-09T08:24:54.016" v="77"/>
-        <pc:sldMkLst>
-          <pc:docMk/>
-          <pc:sldMk cId="2487598261" sldId="305"/>
-        </pc:sldMkLst>
-      </pc:sldChg>
-      <pc:sldChg chg="del">
-        <pc:chgData name="Cooling, Chris" userId="6dcf99c9-2ba5-410a-8445-0893a3d1421f" providerId="ADAL" clId="{03CF33AC-D9E4-491F-8963-DAB5E6081A01}" dt="2024-10-07T10:01:12.048" v="12" actId="47"/>
-        <pc:sldMkLst>
-          <pc:docMk/>
-          <pc:sldMk cId="2144980242" sldId="306"/>
-        </pc:sldMkLst>
-      </pc:sldChg>
-      <pc:sldChg chg="add del">
-        <pc:chgData name="Cooling, Chris" userId="6dcf99c9-2ba5-410a-8445-0893a3d1421f" providerId="ADAL" clId="{03CF33AC-D9E4-491F-8963-DAB5E6081A01}" dt="2024-10-09T08:24:54.016" v="77"/>
-        <pc:sldMkLst>
-          <pc:docMk/>
-          <pc:sldMk cId="2798413230" sldId="306"/>
-        </pc:sldMkLst>
-      </pc:sldChg>
-      <pc:sldChg chg="modSp add del mod">
-        <pc:chgData name="Cooling, Chris" userId="6dcf99c9-2ba5-410a-8445-0893a3d1421f" providerId="ADAL" clId="{03CF33AC-D9E4-491F-8963-DAB5E6081A01}" dt="2024-10-09T08:24:54.016" v="77"/>
-        <pc:sldMkLst>
-          <pc:docMk/>
-          <pc:sldMk cId="1390760873" sldId="307"/>
-        </pc:sldMkLst>
-      </pc:sldChg>
-      <pc:sldChg chg="del">
-        <pc:chgData name="Cooling, Chris" userId="6dcf99c9-2ba5-410a-8445-0893a3d1421f" providerId="ADAL" clId="{03CF33AC-D9E4-491F-8963-DAB5E6081A01}" dt="2024-10-07T10:01:12.048" v="12" actId="47"/>
-        <pc:sldMkLst>
-          <pc:docMk/>
-          <pc:sldMk cId="1605751224" sldId="307"/>
-        </pc:sldMkLst>
-      </pc:sldChg>
-      <pc:sldChg chg="add del">
-        <pc:chgData name="Cooling, Chris" userId="6dcf99c9-2ba5-410a-8445-0893a3d1421f" providerId="ADAL" clId="{03CF33AC-D9E4-491F-8963-DAB5E6081A01}" dt="2024-10-09T08:24:54.016" v="77"/>
-        <pc:sldMkLst>
-          <pc:docMk/>
-          <pc:sldMk cId="3749303348" sldId="308"/>
-        </pc:sldMkLst>
-      </pc:sldChg>
-      <pc:sldChg chg="add del">
-        <pc:chgData name="Cooling, Chris" userId="6dcf99c9-2ba5-410a-8445-0893a3d1421f" providerId="ADAL" clId="{03CF33AC-D9E4-491F-8963-DAB5E6081A01}" dt="2024-10-09T08:24:54.016" v="77"/>
-        <pc:sldMkLst>
-          <pc:docMk/>
-          <pc:sldMk cId="933885824" sldId="309"/>
-        </pc:sldMkLst>
-      </pc:sldChg>
-      <pc:sldChg chg="del">
-        <pc:chgData name="Cooling, Chris" userId="6dcf99c9-2ba5-410a-8445-0893a3d1421f" providerId="ADAL" clId="{03CF33AC-D9E4-491F-8963-DAB5E6081A01}" dt="2024-10-07T10:01:12.048" v="12" actId="47"/>
-        <pc:sldMkLst>
-          <pc:docMk/>
-          <pc:sldMk cId="1625291139" sldId="309"/>
-        </pc:sldMkLst>
-      </pc:sldChg>
-      <pc:sldChg chg="add del">
-        <pc:chgData name="Cooling, Chris" userId="6dcf99c9-2ba5-410a-8445-0893a3d1421f" providerId="ADAL" clId="{03CF33AC-D9E4-491F-8963-DAB5E6081A01}" dt="2024-10-09T08:24:54.016" v="77"/>
-        <pc:sldMkLst>
-          <pc:docMk/>
-          <pc:sldMk cId="1654254681" sldId="310"/>
-        </pc:sldMkLst>
-      </pc:sldChg>
-      <pc:sldChg chg="del">
-        <pc:chgData name="Cooling, Chris" userId="6dcf99c9-2ba5-410a-8445-0893a3d1421f" providerId="ADAL" clId="{03CF33AC-D9E4-491F-8963-DAB5E6081A01}" dt="2024-10-07T10:01:12.048" v="12" actId="47"/>
-        <pc:sldMkLst>
-          <pc:docMk/>
-          <pc:sldMk cId="2936075367" sldId="310"/>
-        </pc:sldMkLst>
-      </pc:sldChg>
-      <pc:sldChg chg="add del">
-        <pc:chgData name="Cooling, Chris" userId="6dcf99c9-2ba5-410a-8445-0893a3d1421f" providerId="ADAL" clId="{03CF33AC-D9E4-491F-8963-DAB5E6081A01}" dt="2024-10-09T08:24:54.016" v="77"/>
-        <pc:sldMkLst>
-          <pc:docMk/>
-          <pc:sldMk cId="2312507278" sldId="311"/>
-        </pc:sldMkLst>
-      </pc:sldChg>
-      <pc:sldChg chg="del">
-        <pc:chgData name="Cooling, Chris" userId="6dcf99c9-2ba5-410a-8445-0893a3d1421f" providerId="ADAL" clId="{03CF33AC-D9E4-491F-8963-DAB5E6081A01}" dt="2024-10-07T10:01:12.048" v="12" actId="47"/>
-        <pc:sldMkLst>
-          <pc:docMk/>
-          <pc:sldMk cId="3006217861" sldId="311"/>
-        </pc:sldMkLst>
-      </pc:sldChg>
-      <pc:sldChg chg="del">
-        <pc:chgData name="Cooling, Chris" userId="6dcf99c9-2ba5-410a-8445-0893a3d1421f" providerId="ADAL" clId="{03CF33AC-D9E4-491F-8963-DAB5E6081A01}" dt="2024-10-07T10:01:12.048" v="12" actId="47"/>
-        <pc:sldMkLst>
-          <pc:docMk/>
-          <pc:sldMk cId="2003892851" sldId="312"/>
-        </pc:sldMkLst>
-      </pc:sldChg>
-      <pc:sldChg chg="modSp add del mod">
-        <pc:chgData name="Cooling, Chris" userId="6dcf99c9-2ba5-410a-8445-0893a3d1421f" providerId="ADAL" clId="{03CF33AC-D9E4-491F-8963-DAB5E6081A01}" dt="2024-10-09T08:24:54.016" v="77"/>
-        <pc:sldMkLst>
-          <pc:docMk/>
-          <pc:sldMk cId="2539671263" sldId="312"/>
-        </pc:sldMkLst>
-      </pc:sldChg>
-      <pc:sldChg chg="add del">
-        <pc:chgData name="Cooling, Chris" userId="6dcf99c9-2ba5-410a-8445-0893a3d1421f" providerId="ADAL" clId="{03CF33AC-D9E4-491F-8963-DAB5E6081A01}" dt="2024-10-09T08:24:54.016" v="77"/>
-        <pc:sldMkLst>
-          <pc:docMk/>
-          <pc:sldMk cId="3744006074" sldId="313"/>
-        </pc:sldMkLst>
-      </pc:sldChg>
-      <pc:sldChg chg="del">
-        <pc:chgData name="Cooling, Chris" userId="6dcf99c9-2ba5-410a-8445-0893a3d1421f" providerId="ADAL" clId="{03CF33AC-D9E4-491F-8963-DAB5E6081A01}" dt="2024-10-07T10:01:12.048" v="12" actId="47"/>
-        <pc:sldMkLst>
-          <pc:docMk/>
-          <pc:sldMk cId="3899447933" sldId="313"/>
-        </pc:sldMkLst>
-      </pc:sldChg>
-      <pc:sldChg chg="del">
-        <pc:chgData name="Cooling, Chris" userId="6dcf99c9-2ba5-410a-8445-0893a3d1421f" providerId="ADAL" clId="{03CF33AC-D9E4-491F-8963-DAB5E6081A01}" dt="2024-10-07T10:01:12.048" v="12" actId="47"/>
-        <pc:sldMkLst>
-          <pc:docMk/>
-          <pc:sldMk cId="667031554" sldId="314"/>
-        </pc:sldMkLst>
-      </pc:sldChg>
-      <pc:sldChg chg="add del">
-        <pc:chgData name="Cooling, Chris" userId="6dcf99c9-2ba5-410a-8445-0893a3d1421f" providerId="ADAL" clId="{03CF33AC-D9E4-491F-8963-DAB5E6081A01}" dt="2024-10-09T08:24:54.016" v="77"/>
-        <pc:sldMkLst>
-          <pc:docMk/>
-          <pc:sldMk cId="1378110722" sldId="314"/>
-        </pc:sldMkLst>
-      </pc:sldChg>
-      <pc:sldChg chg="add del">
-        <pc:chgData name="Cooling, Chris" userId="6dcf99c9-2ba5-410a-8445-0893a3d1421f" providerId="ADAL" clId="{03CF33AC-D9E4-491F-8963-DAB5E6081A01}" dt="2024-10-09T08:24:54.016" v="77"/>
-        <pc:sldMkLst>
-          <pc:docMk/>
-          <pc:sldMk cId="3968020684" sldId="315"/>
-        </pc:sldMkLst>
-      </pc:sldChg>
-      <pc:sldChg chg="add del">
-        <pc:chgData name="Cooling, Chris" userId="6dcf99c9-2ba5-410a-8445-0893a3d1421f" providerId="ADAL" clId="{03CF33AC-D9E4-491F-8963-DAB5E6081A01}" dt="2024-10-09T08:24:54.016" v="77"/>
-        <pc:sldMkLst>
-          <pc:docMk/>
-          <pc:sldMk cId="3897677485" sldId="316"/>
-        </pc:sldMkLst>
-      </pc:sldChg>
-      <pc:sldChg chg="add del">
-        <pc:chgData name="Cooling, Chris" userId="6dcf99c9-2ba5-410a-8445-0893a3d1421f" providerId="ADAL" clId="{03CF33AC-D9E4-491F-8963-DAB5E6081A01}" dt="2024-10-09T08:24:54.016" v="77"/>
-        <pc:sldMkLst>
-          <pc:docMk/>
-          <pc:sldMk cId="2040837939" sldId="317"/>
-        </pc:sldMkLst>
-      </pc:sldChg>
-      <pc:sldChg chg="add del">
-        <pc:chgData name="Cooling, Chris" userId="6dcf99c9-2ba5-410a-8445-0893a3d1421f" providerId="ADAL" clId="{03CF33AC-D9E4-491F-8963-DAB5E6081A01}" dt="2024-10-09T08:24:54.016" v="77"/>
-        <pc:sldMkLst>
-          <pc:docMk/>
-          <pc:sldMk cId="3162482540" sldId="318"/>
-        </pc:sldMkLst>
-      </pc:sldChg>
-      <pc:sldChg chg="add del">
-        <pc:chgData name="Cooling, Chris" userId="6dcf99c9-2ba5-410a-8445-0893a3d1421f" providerId="ADAL" clId="{03CF33AC-D9E4-491F-8963-DAB5E6081A01}" dt="2024-10-09T08:24:54.016" v="77"/>
-        <pc:sldMkLst>
-          <pc:docMk/>
-          <pc:sldMk cId="265627358" sldId="319"/>
-        </pc:sldMkLst>
-      </pc:sldChg>
-      <pc:sldChg chg="del">
-        <pc:chgData name="Cooling, Chris" userId="6dcf99c9-2ba5-410a-8445-0893a3d1421f" providerId="ADAL" clId="{03CF33AC-D9E4-491F-8963-DAB5E6081A01}" dt="2024-10-07T10:01:12.048" v="12" actId="47"/>
-        <pc:sldMkLst>
-          <pc:docMk/>
-          <pc:sldMk cId="4162562936" sldId="319"/>
-        </pc:sldMkLst>
-      </pc:sldChg>
-      <pc:sldChg chg="del">
-        <pc:chgData name="Cooling, Chris" userId="6dcf99c9-2ba5-410a-8445-0893a3d1421f" providerId="ADAL" clId="{03CF33AC-D9E4-491F-8963-DAB5E6081A01}" dt="2024-10-07T10:01:12.048" v="12" actId="47"/>
-        <pc:sldMkLst>
-          <pc:docMk/>
-          <pc:sldMk cId="3203343339" sldId="320"/>
-        </pc:sldMkLst>
-      </pc:sldChg>
-      <pc:sldChg chg="add del">
-        <pc:chgData name="Cooling, Chris" userId="6dcf99c9-2ba5-410a-8445-0893a3d1421f" providerId="ADAL" clId="{03CF33AC-D9E4-491F-8963-DAB5E6081A01}" dt="2024-10-09T08:24:54.016" v="77"/>
-        <pc:sldMkLst>
-          <pc:docMk/>
-          <pc:sldMk cId="3716300829" sldId="320"/>
-        </pc:sldMkLst>
-      </pc:sldChg>
-      <pc:sldChg chg="del">
-        <pc:chgData name="Cooling, Chris" userId="6dcf99c9-2ba5-410a-8445-0893a3d1421f" providerId="ADAL" clId="{03CF33AC-D9E4-491F-8963-DAB5E6081A01}" dt="2024-10-07T10:01:12.048" v="12" actId="47"/>
-        <pc:sldMkLst>
-          <pc:docMk/>
-          <pc:sldMk cId="2914583150" sldId="321"/>
-        </pc:sldMkLst>
-      </pc:sldChg>
-      <pc:sldChg chg="del">
-        <pc:chgData name="Cooling, Chris" userId="6dcf99c9-2ba5-410a-8445-0893a3d1421f" providerId="ADAL" clId="{03CF33AC-D9E4-491F-8963-DAB5E6081A01}" dt="2024-10-07T10:00:20.101" v="0" actId="47"/>
-        <pc:sldMkLst>
-          <pc:docMk/>
-          <pc:sldMk cId="4254443235" sldId="322"/>
-        </pc:sldMkLst>
-      </pc:sldChg>
-      <pc:sldChg chg="add del">
-        <pc:chgData name="Cooling, Chris" userId="6dcf99c9-2ba5-410a-8445-0893a3d1421f" providerId="ADAL" clId="{03CF33AC-D9E4-491F-8963-DAB5E6081A01}" dt="2024-10-09T08:24:54.016" v="77"/>
-        <pc:sldMkLst>
-          <pc:docMk/>
-          <pc:sldMk cId="200963720" sldId="323"/>
-        </pc:sldMkLst>
-      </pc:sldChg>
-      <pc:sldChg chg="del">
-        <pc:chgData name="Cooling, Chris" userId="6dcf99c9-2ba5-410a-8445-0893a3d1421f" providerId="ADAL" clId="{03CF33AC-D9E4-491F-8963-DAB5E6081A01}" dt="2024-10-07T10:00:20.101" v="0" actId="47"/>
-        <pc:sldMkLst>
-          <pc:docMk/>
-          <pc:sldMk cId="3212729572" sldId="323"/>
-        </pc:sldMkLst>
-      </pc:sldChg>
       <pc:sldChg chg="modSp mod">
-        <pc:chgData name="Cooling, Chris" userId="6dcf99c9-2ba5-410a-8445-0893a3d1421f" providerId="ADAL" clId="{03CF33AC-D9E4-491F-8963-DAB5E6081A01}" dt="2024-10-07T10:00:45.879" v="10"/>
-        <pc:sldMkLst>
-          <pc:docMk/>
-          <pc:sldMk cId="474143756" sldId="324"/>
-        </pc:sldMkLst>
-      </pc:sldChg>
-      <pc:sldChg chg="modSp add del mod">
-        <pc:chgData name="Cooling, Chris" userId="6dcf99c9-2ba5-410a-8445-0893a3d1421f" providerId="ADAL" clId="{03CF33AC-D9E4-491F-8963-DAB5E6081A01}" dt="2024-10-09T08:24:54.016" v="77"/>
-        <pc:sldMkLst>
-          <pc:docMk/>
-          <pc:sldMk cId="3173781080" sldId="325"/>
-        </pc:sldMkLst>
-      </pc:sldChg>
-      <pc:sldChg chg="del">
-        <pc:chgData name="Cooling, Chris" userId="6dcf99c9-2ba5-410a-8445-0893a3d1421f" providerId="ADAL" clId="{03CF33AC-D9E4-491F-8963-DAB5E6081A01}" dt="2024-10-07T10:00:23.468" v="1" actId="47"/>
-        <pc:sldMkLst>
-          <pc:docMk/>
-          <pc:sldMk cId="3528320225" sldId="325"/>
-        </pc:sldMkLst>
-      </pc:sldChg>
-      <pc:sldChg chg="add del modNotesTx">
-        <pc:chgData name="Cooling, Chris" userId="6dcf99c9-2ba5-410a-8445-0893a3d1421f" providerId="ADAL" clId="{03CF33AC-D9E4-491F-8963-DAB5E6081A01}" dt="2024-10-11T11:01:39.595" v="3725" actId="20577"/>
-        <pc:sldMkLst>
-          <pc:docMk/>
-          <pc:sldMk cId="380350440" sldId="326"/>
-        </pc:sldMkLst>
-      </pc:sldChg>
-      <pc:sldChg chg="add del">
-        <pc:chgData name="Cooling, Chris" userId="6dcf99c9-2ba5-410a-8445-0893a3d1421f" providerId="ADAL" clId="{03CF33AC-D9E4-491F-8963-DAB5E6081A01}" dt="2024-10-09T08:24:54.016" v="77"/>
-        <pc:sldMkLst>
-          <pc:docMk/>
-          <pc:sldMk cId="3835658580" sldId="326"/>
-        </pc:sldMkLst>
-      </pc:sldChg>
-      <pc:sldChg chg="del">
-        <pc:chgData name="Cooling, Chris" userId="6dcf99c9-2ba5-410a-8445-0893a3d1421f" providerId="ADAL" clId="{03CF33AC-D9E4-491F-8963-DAB5E6081A01}" dt="2024-10-07T10:01:12.048" v="12" actId="47"/>
-        <pc:sldMkLst>
-          <pc:docMk/>
-          <pc:sldMk cId="680408341" sldId="327"/>
-        </pc:sldMkLst>
-      </pc:sldChg>
-      <pc:sldChg chg="add del">
-        <pc:chgData name="Cooling, Chris" userId="6dcf99c9-2ba5-410a-8445-0893a3d1421f" providerId="ADAL" clId="{03CF33AC-D9E4-491F-8963-DAB5E6081A01}" dt="2024-10-09T08:24:54.016" v="77"/>
-        <pc:sldMkLst>
-          <pc:docMk/>
-          <pc:sldMk cId="2646455873" sldId="327"/>
-        </pc:sldMkLst>
-      </pc:sldChg>
-      <pc:sldChg chg="add del">
-        <pc:chgData name="Cooling, Chris" userId="6dcf99c9-2ba5-410a-8445-0893a3d1421f" providerId="ADAL" clId="{03CF33AC-D9E4-491F-8963-DAB5E6081A01}" dt="2024-10-09T08:24:54.016" v="77"/>
-        <pc:sldMkLst>
-          <pc:docMk/>
-          <pc:sldMk cId="721358061" sldId="328"/>
-        </pc:sldMkLst>
-      </pc:sldChg>
-      <pc:sldChg chg="del">
-        <pc:chgData name="Cooling, Chris" userId="6dcf99c9-2ba5-410a-8445-0893a3d1421f" providerId="ADAL" clId="{03CF33AC-D9E4-491F-8963-DAB5E6081A01}" dt="2024-10-07T10:01:12.048" v="12" actId="47"/>
-        <pc:sldMkLst>
-          <pc:docMk/>
-          <pc:sldMk cId="1500357233" sldId="328"/>
-        </pc:sldMkLst>
-      </pc:sldChg>
-      <pc:sldChg chg="add del">
-        <pc:chgData name="Cooling, Chris" userId="6dcf99c9-2ba5-410a-8445-0893a3d1421f" providerId="ADAL" clId="{03CF33AC-D9E4-491F-8963-DAB5E6081A01}" dt="2024-10-09T08:24:54.016" v="77"/>
-        <pc:sldMkLst>
-          <pc:docMk/>
-          <pc:sldMk cId="2899337003" sldId="329"/>
-        </pc:sldMkLst>
-      </pc:sldChg>
-      <pc:sldChg chg="del">
-        <pc:chgData name="Cooling, Chris" userId="6dcf99c9-2ba5-410a-8445-0893a3d1421f" providerId="ADAL" clId="{03CF33AC-D9E4-491F-8963-DAB5E6081A01}" dt="2024-10-07T10:01:12.048" v="12" actId="47"/>
-        <pc:sldMkLst>
-          <pc:docMk/>
-          <pc:sldMk cId="3005038552" sldId="329"/>
-        </pc:sldMkLst>
-      </pc:sldChg>
-      <pc:sldChg chg="del">
-        <pc:chgData name="Cooling, Chris" userId="6dcf99c9-2ba5-410a-8445-0893a3d1421f" providerId="ADAL" clId="{03CF33AC-D9E4-491F-8963-DAB5E6081A01}" dt="2024-10-07T10:01:12.048" v="12" actId="47"/>
-        <pc:sldMkLst>
-          <pc:docMk/>
-          <pc:sldMk cId="266649059" sldId="330"/>
-        </pc:sldMkLst>
-      </pc:sldChg>
-      <pc:sldChg chg="add del">
-        <pc:chgData name="Cooling, Chris" userId="6dcf99c9-2ba5-410a-8445-0893a3d1421f" providerId="ADAL" clId="{03CF33AC-D9E4-491F-8963-DAB5E6081A01}" dt="2024-10-09T08:24:54.016" v="77"/>
-        <pc:sldMkLst>
-          <pc:docMk/>
-          <pc:sldMk cId="3099411356" sldId="330"/>
-        </pc:sldMkLst>
-      </pc:sldChg>
-      <pc:sldChg chg="del">
-        <pc:chgData name="Cooling, Chris" userId="6dcf99c9-2ba5-410a-8445-0893a3d1421f" providerId="ADAL" clId="{03CF33AC-D9E4-491F-8963-DAB5E6081A01}" dt="2024-10-07T10:01:12.048" v="12" actId="47"/>
-        <pc:sldMkLst>
-          <pc:docMk/>
-          <pc:sldMk cId="356225027" sldId="331"/>
-        </pc:sldMkLst>
-      </pc:sldChg>
-      <pc:sldChg chg="add del">
-        <pc:chgData name="Cooling, Chris" userId="6dcf99c9-2ba5-410a-8445-0893a3d1421f" providerId="ADAL" clId="{03CF33AC-D9E4-491F-8963-DAB5E6081A01}" dt="2024-10-09T08:24:54.016" v="77"/>
-        <pc:sldMkLst>
-          <pc:docMk/>
-          <pc:sldMk cId="2958191099" sldId="331"/>
-        </pc:sldMkLst>
-      </pc:sldChg>
-      <pc:sldChg chg="add del">
-        <pc:chgData name="Cooling, Chris" userId="6dcf99c9-2ba5-410a-8445-0893a3d1421f" providerId="ADAL" clId="{03CF33AC-D9E4-491F-8963-DAB5E6081A01}" dt="2024-10-09T08:24:54.016" v="77"/>
-        <pc:sldMkLst>
-          <pc:docMk/>
-          <pc:sldMk cId="1839592679" sldId="332"/>
-        </pc:sldMkLst>
-      </pc:sldChg>
-      <pc:sldChg chg="del">
-        <pc:chgData name="Cooling, Chris" userId="6dcf99c9-2ba5-410a-8445-0893a3d1421f" providerId="ADAL" clId="{03CF33AC-D9E4-491F-8963-DAB5E6081A01}" dt="2024-10-07T10:01:12.048" v="12" actId="47"/>
-        <pc:sldMkLst>
-          <pc:docMk/>
-          <pc:sldMk cId="3685198326" sldId="332"/>
-        </pc:sldMkLst>
-      </pc:sldChg>
-      <pc:sldChg chg="del">
-        <pc:chgData name="Cooling, Chris" userId="6dcf99c9-2ba5-410a-8445-0893a3d1421f" providerId="ADAL" clId="{03CF33AC-D9E4-491F-8963-DAB5E6081A01}" dt="2024-10-07T10:01:12.048" v="12" actId="47"/>
-        <pc:sldMkLst>
-          <pc:docMk/>
-          <pc:sldMk cId="1410114096" sldId="333"/>
-        </pc:sldMkLst>
-      </pc:sldChg>
-      <pc:sldChg chg="add del">
-        <pc:chgData name="Cooling, Chris" userId="6dcf99c9-2ba5-410a-8445-0893a3d1421f" providerId="ADAL" clId="{03CF33AC-D9E4-491F-8963-DAB5E6081A01}" dt="2024-10-09T08:24:54.016" v="77"/>
-        <pc:sldMkLst>
-          <pc:docMk/>
-          <pc:sldMk cId="1971978791" sldId="333"/>
-        </pc:sldMkLst>
-      </pc:sldChg>
-      <pc:sldChg chg="add">
-        <pc:chgData name="Cooling, Chris" userId="6dcf99c9-2ba5-410a-8445-0893a3d1421f" providerId="ADAL" clId="{03CF33AC-D9E4-491F-8963-DAB5E6081A01}" dt="2024-10-07T10:00:56.106" v="11"/>
-        <pc:sldMkLst>
-          <pc:docMk/>
-          <pc:sldMk cId="243918697" sldId="334"/>
-        </pc:sldMkLst>
-      </pc:sldChg>
-      <pc:sldChg chg="add">
-        <pc:chgData name="Cooling, Chris" userId="6dcf99c9-2ba5-410a-8445-0893a3d1421f" providerId="ADAL" clId="{03CF33AC-D9E4-491F-8963-DAB5E6081A01}" dt="2024-10-07T10:01:32.024" v="14"/>
-        <pc:sldMkLst>
-          <pc:docMk/>
-          <pc:sldMk cId="1507190070" sldId="359"/>
-        </pc:sldMkLst>
-      </pc:sldChg>
-      <pc:sldChg chg="modSp add mod">
-        <pc:chgData name="Cooling, Chris" userId="6dcf99c9-2ba5-410a-8445-0893a3d1421f" providerId="ADAL" clId="{03CF33AC-D9E4-491F-8963-DAB5E6081A01}" dt="2024-10-07T10:02:34.276" v="23" actId="12"/>
-        <pc:sldMkLst>
-          <pc:docMk/>
-          <pc:sldMk cId="16407505" sldId="361"/>
-        </pc:sldMkLst>
-      </pc:sldChg>
-      <pc:sldChg chg="addSp delSp modSp add mod modNotesTx">
-        <pc:chgData name="Cooling, Chris" userId="6dcf99c9-2ba5-410a-8445-0893a3d1421f" providerId="ADAL" clId="{03CF33AC-D9E4-491F-8963-DAB5E6081A01}" dt="2024-10-09T08:27:38.886" v="95"/>
-        <pc:sldMkLst>
-          <pc:docMk/>
-          <pc:sldMk cId="650368403" sldId="362"/>
-        </pc:sldMkLst>
-      </pc:sldChg>
-      <pc:sldChg chg="add del">
-        <pc:chgData name="Cooling, Chris" userId="6dcf99c9-2ba5-410a-8445-0893a3d1421f" providerId="ADAL" clId="{03CF33AC-D9E4-491F-8963-DAB5E6081A01}" dt="2024-10-09T08:24:54.016" v="77"/>
-        <pc:sldMkLst>
-          <pc:docMk/>
-          <pc:sldMk cId="813487936" sldId="362"/>
-        </pc:sldMkLst>
-      </pc:sldChg>
-      <pc:sldChg chg="add del">
-        <pc:chgData name="Cooling, Chris" userId="6dcf99c9-2ba5-410a-8445-0893a3d1421f" providerId="ADAL" clId="{03CF33AC-D9E4-491F-8963-DAB5E6081A01}" dt="2024-10-09T08:23:15.889" v="66" actId="47"/>
-        <pc:sldMkLst>
-          <pc:docMk/>
-          <pc:sldMk cId="1250198557" sldId="362"/>
-        </pc:sldMkLst>
-      </pc:sldChg>
-      <pc:sldChg chg="add del">
-        <pc:chgData name="Cooling, Chris" userId="6dcf99c9-2ba5-410a-8445-0893a3d1421f" providerId="ADAL" clId="{03CF33AC-D9E4-491F-8963-DAB5E6081A01}" dt="2024-10-09T08:23:15.889" v="66" actId="47"/>
-        <pc:sldMkLst>
-          <pc:docMk/>
-          <pc:sldMk cId="1454384184" sldId="363"/>
-        </pc:sldMkLst>
-      </pc:sldChg>
-      <pc:sldChg chg="modSp add mod modNotesTx">
-        <pc:chgData name="Cooling, Chris" userId="6dcf99c9-2ba5-410a-8445-0893a3d1421f" providerId="ADAL" clId="{03CF33AC-D9E4-491F-8963-DAB5E6081A01}" dt="2024-10-09T12:42:50.846" v="1693"/>
-        <pc:sldMkLst>
-          <pc:docMk/>
-          <pc:sldMk cId="3498346720" sldId="363"/>
-        </pc:sldMkLst>
-      </pc:sldChg>
-      <pc:sldChg chg="addSp modSp add mod modNotesTx">
-        <pc:chgData name="Cooling, Chris" userId="6dcf99c9-2ba5-410a-8445-0893a3d1421f" providerId="ADAL" clId="{03CF33AC-D9E4-491F-8963-DAB5E6081A01}" dt="2024-10-09T08:30:11.711" v="127" actId="1076"/>
-        <pc:sldMkLst>
-          <pc:docMk/>
-          <pc:sldMk cId="721571596" sldId="364"/>
-        </pc:sldMkLst>
-      </pc:sldChg>
-      <pc:sldChg chg="modSp add del mod">
-        <pc:chgData name="Cooling, Chris" userId="6dcf99c9-2ba5-410a-8445-0893a3d1421f" providerId="ADAL" clId="{03CF33AC-D9E4-491F-8963-DAB5E6081A01}" dt="2024-10-09T08:23:15.889" v="66" actId="47"/>
-        <pc:sldMkLst>
-          <pc:docMk/>
-          <pc:sldMk cId="3248724752" sldId="364"/>
-        </pc:sldMkLst>
-      </pc:sldChg>
-      <pc:sldChg chg="addSp delSp modSp add mod modNotesTx">
-        <pc:chgData name="Cooling, Chris" userId="6dcf99c9-2ba5-410a-8445-0893a3d1421f" providerId="ADAL" clId="{03CF33AC-D9E4-491F-8963-DAB5E6081A01}" dt="2024-10-09T08:31:43.076" v="140"/>
-        <pc:sldMkLst>
-          <pc:docMk/>
-          <pc:sldMk cId="1370984878" sldId="365"/>
-        </pc:sldMkLst>
-      </pc:sldChg>
-      <pc:sldChg chg="add del">
-        <pc:chgData name="Cooling, Chris" userId="6dcf99c9-2ba5-410a-8445-0893a3d1421f" providerId="ADAL" clId="{03CF33AC-D9E4-491F-8963-DAB5E6081A01}" dt="2024-10-09T08:29:41.131" v="122" actId="47"/>
-        <pc:sldMkLst>
-          <pc:docMk/>
-          <pc:sldMk cId="2092285345" sldId="365"/>
-        </pc:sldMkLst>
-      </pc:sldChg>
-      <pc:sldChg chg="add del">
-        <pc:chgData name="Cooling, Chris" userId="6dcf99c9-2ba5-410a-8445-0893a3d1421f" providerId="ADAL" clId="{03CF33AC-D9E4-491F-8963-DAB5E6081A01}" dt="2024-10-09T08:23:15.889" v="66" actId="47"/>
-        <pc:sldMkLst>
-          <pc:docMk/>
-          <pc:sldMk cId="3227858941" sldId="365"/>
-        </pc:sldMkLst>
-      </pc:sldChg>
-      <pc:sldChg chg="add del">
-        <pc:chgData name="Cooling, Chris" userId="6dcf99c9-2ba5-410a-8445-0893a3d1421f" providerId="ADAL" clId="{03CF33AC-D9E4-491F-8963-DAB5E6081A01}" dt="2024-10-09T08:23:15.889" v="66" actId="47"/>
-        <pc:sldMkLst>
-          <pc:docMk/>
-          <pc:sldMk cId="766773942" sldId="366"/>
-        </pc:sldMkLst>
-      </pc:sldChg>
-      <pc:sldChg chg="addSp delSp modSp add mod modNotesTx">
-        <pc:chgData name="Cooling, Chris" userId="6dcf99c9-2ba5-410a-8445-0893a3d1421f" providerId="ADAL" clId="{03CF33AC-D9E4-491F-8963-DAB5E6081A01}" dt="2024-10-09T08:43:00.265" v="182" actId="14100"/>
-        <pc:sldMkLst>
-          <pc:docMk/>
-          <pc:sldMk cId="2862336388" sldId="366"/>
-        </pc:sldMkLst>
-      </pc:sldChg>
-      <pc:sldChg chg="modSp add mod modNotesTx">
-        <pc:chgData name="Cooling, Chris" userId="6dcf99c9-2ba5-410a-8445-0893a3d1421f" providerId="ADAL" clId="{03CF33AC-D9E4-491F-8963-DAB5E6081A01}" dt="2024-10-09T08:42:45.098" v="181" actId="14100"/>
-        <pc:sldMkLst>
-          <pc:docMk/>
-          <pc:sldMk cId="49263487" sldId="367"/>
-        </pc:sldMkLst>
-      </pc:sldChg>
-      <pc:sldChg chg="add del">
-        <pc:chgData name="Cooling, Chris" userId="6dcf99c9-2ba5-410a-8445-0893a3d1421f" providerId="ADAL" clId="{03CF33AC-D9E4-491F-8963-DAB5E6081A01}" dt="2024-10-09T08:23:15.889" v="66" actId="47"/>
-        <pc:sldMkLst>
-          <pc:docMk/>
-          <pc:sldMk cId="812463129" sldId="367"/>
-        </pc:sldMkLst>
-      </pc:sldChg>
-      <pc:sldChg chg="add del">
-        <pc:chgData name="Cooling, Chris" userId="6dcf99c9-2ba5-410a-8445-0893a3d1421f" providerId="ADAL" clId="{03CF33AC-D9E4-491F-8963-DAB5E6081A01}" dt="2024-10-09T08:23:15.889" v="66" actId="47"/>
-        <pc:sldMkLst>
-          <pc:docMk/>
-          <pc:sldMk cId="735192102" sldId="368"/>
-        </pc:sldMkLst>
-      </pc:sldChg>
-      <pc:sldChg chg="addSp modSp add mod modNotesTx">
-        <pc:chgData name="Cooling, Chris" userId="6dcf99c9-2ba5-410a-8445-0893a3d1421f" providerId="ADAL" clId="{03CF33AC-D9E4-491F-8963-DAB5E6081A01}" dt="2024-10-09T08:42:38.126" v="180" actId="14100"/>
-        <pc:sldMkLst>
-          <pc:docMk/>
-          <pc:sldMk cId="3636830078" sldId="368"/>
-        </pc:sldMkLst>
-      </pc:sldChg>
-      <pc:sldChg chg="addSp delSp modSp add mod modNotesTx">
-        <pc:chgData name="Cooling, Chris" userId="6dcf99c9-2ba5-410a-8445-0893a3d1421f" providerId="ADAL" clId="{03CF33AC-D9E4-491F-8963-DAB5E6081A01}" dt="2024-10-09T08:49:02.679" v="916" actId="20577"/>
-        <pc:sldMkLst>
-          <pc:docMk/>
-          <pc:sldMk cId="1646575661" sldId="369"/>
-        </pc:sldMkLst>
-      </pc:sldChg>
-      <pc:sldChg chg="add del">
-        <pc:chgData name="Cooling, Chris" userId="6dcf99c9-2ba5-410a-8445-0893a3d1421f" providerId="ADAL" clId="{03CF33AC-D9E4-491F-8963-DAB5E6081A01}" dt="2024-10-09T08:23:15.889" v="66" actId="47"/>
-        <pc:sldMkLst>
-          <pc:docMk/>
-          <pc:sldMk cId="2428056926" sldId="369"/>
-        </pc:sldMkLst>
-      </pc:sldChg>
-      <pc:sldChg chg="addSp delSp modSp add mod modNotesTx">
-        <pc:chgData name="Cooling, Chris" userId="6dcf99c9-2ba5-410a-8445-0893a3d1421f" providerId="ADAL" clId="{03CF33AC-D9E4-491F-8963-DAB5E6081A01}" dt="2024-10-09T08:58:53.849" v="1261"/>
-        <pc:sldMkLst>
-          <pc:docMk/>
-          <pc:sldMk cId="919066874" sldId="370"/>
-        </pc:sldMkLst>
-      </pc:sldChg>
-      <pc:sldChg chg="add del">
-        <pc:chgData name="Cooling, Chris" userId="6dcf99c9-2ba5-410a-8445-0893a3d1421f" providerId="ADAL" clId="{03CF33AC-D9E4-491F-8963-DAB5E6081A01}" dt="2024-10-09T08:23:15.889" v="66" actId="47"/>
-        <pc:sldMkLst>
-          <pc:docMk/>
-          <pc:sldMk cId="3966698890" sldId="370"/>
-        </pc:sldMkLst>
-      </pc:sldChg>
-      <pc:sldChg chg="add del">
-        <pc:chgData name="Cooling, Chris" userId="6dcf99c9-2ba5-410a-8445-0893a3d1421f" providerId="ADAL" clId="{03CF33AC-D9E4-491F-8963-DAB5E6081A01}" dt="2024-10-09T08:23:15.889" v="66" actId="47"/>
-        <pc:sldMkLst>
-          <pc:docMk/>
-          <pc:sldMk cId="3168009626" sldId="371"/>
-        </pc:sldMkLst>
-      </pc:sldChg>
-      <pc:sldChg chg="modSp add mod modNotesTx">
-        <pc:chgData name="Cooling, Chris" userId="6dcf99c9-2ba5-410a-8445-0893a3d1421f" providerId="ADAL" clId="{03CF33AC-D9E4-491F-8963-DAB5E6081A01}" dt="2024-10-09T08:57:28.778" v="1256"/>
-        <pc:sldMkLst>
-          <pc:docMk/>
-          <pc:sldMk cId="3388074364" sldId="371"/>
-        </pc:sldMkLst>
-      </pc:sldChg>
-      <pc:sldChg chg="add del">
-        <pc:chgData name="Cooling, Chris" userId="6dcf99c9-2ba5-410a-8445-0893a3d1421f" providerId="ADAL" clId="{03CF33AC-D9E4-491F-8963-DAB5E6081A01}" dt="2024-10-09T08:23:15.889" v="66" actId="47"/>
-        <pc:sldMkLst>
-          <pc:docMk/>
-          <pc:sldMk cId="2053716256" sldId="372"/>
-        </pc:sldMkLst>
-      </pc:sldChg>
-      <pc:sldChg chg="addSp delSp modSp add mod modNotesTx">
-        <pc:chgData name="Cooling, Chris" userId="6dcf99c9-2ba5-410a-8445-0893a3d1421f" providerId="ADAL" clId="{03CF33AC-D9E4-491F-8963-DAB5E6081A01}" dt="2024-10-09T08:59:30.077" v="1267" actId="6549"/>
-        <pc:sldMkLst>
-          <pc:docMk/>
-          <pc:sldMk cId="2099201432" sldId="372"/>
-        </pc:sldMkLst>
-      </pc:sldChg>
-      <pc:sldChg chg="delSp modSp add mod modNotesTx">
-        <pc:chgData name="Cooling, Chris" userId="6dcf99c9-2ba5-410a-8445-0893a3d1421f" providerId="ADAL" clId="{03CF33AC-D9E4-491F-8963-DAB5E6081A01}" dt="2024-10-09T09:05:25.364" v="1283"/>
-        <pc:sldMkLst>
-          <pc:docMk/>
-          <pc:sldMk cId="1204830268" sldId="373"/>
-        </pc:sldMkLst>
-      </pc:sldChg>
-      <pc:sldChg chg="add del">
-        <pc:chgData name="Cooling, Chris" userId="6dcf99c9-2ba5-410a-8445-0893a3d1421f" providerId="ADAL" clId="{03CF33AC-D9E4-491F-8963-DAB5E6081A01}" dt="2024-10-09T08:23:15.889" v="66" actId="47"/>
-        <pc:sldMkLst>
-          <pc:docMk/>
-          <pc:sldMk cId="2958191099" sldId="373"/>
-        </pc:sldMkLst>
-      </pc:sldChg>
-      <pc:sldChg chg="add del">
-        <pc:chgData name="Cooling, Chris" userId="6dcf99c9-2ba5-410a-8445-0893a3d1421f" providerId="ADAL" clId="{03CF33AC-D9E4-491F-8963-DAB5E6081A01}" dt="2024-10-09T08:23:15.889" v="66" actId="47"/>
-        <pc:sldMkLst>
-          <pc:docMk/>
-          <pc:sldMk cId="746547034" sldId="374"/>
-        </pc:sldMkLst>
-      </pc:sldChg>
-      <pc:sldChg chg="modSp add mod modNotesTx">
-        <pc:chgData name="Cooling, Chris" userId="6dcf99c9-2ba5-410a-8445-0893a3d1421f" providerId="ADAL" clId="{03CF33AC-D9E4-491F-8963-DAB5E6081A01}" dt="2024-10-09T09:04:48.261" v="1282"/>
-        <pc:sldMkLst>
-          <pc:docMk/>
-          <pc:sldMk cId="1108594804" sldId="374"/>
-        </pc:sldMkLst>
-      </pc:sldChg>
-      <pc:sldChg chg="new del">
-        <pc:chgData name="Cooling, Chris" userId="6dcf99c9-2ba5-410a-8445-0893a3d1421f" providerId="ADAL" clId="{03CF33AC-D9E4-491F-8963-DAB5E6081A01}" dt="2024-10-09T09:01:09.430" v="1276" actId="2696"/>
-        <pc:sldMkLst>
-          <pc:docMk/>
-          <pc:sldMk cId="1777365485" sldId="374"/>
-        </pc:sldMkLst>
-      </pc:sldChg>
-      <pc:sldChg chg="addSp modSp add mod modNotesTx">
-        <pc:chgData name="Cooling, Chris" userId="6dcf99c9-2ba5-410a-8445-0893a3d1421f" providerId="ADAL" clId="{03CF33AC-D9E4-491F-8963-DAB5E6081A01}" dt="2024-10-09T13:03:34.764" v="2519" actId="20577"/>
-        <pc:sldMkLst>
-          <pc:docMk/>
-          <pc:sldMk cId="2224630467" sldId="375"/>
-        </pc:sldMkLst>
-      </pc:sldChg>
-      <pc:sldChg chg="modSp add del mod">
-        <pc:chgData name="Cooling, Chris" userId="6dcf99c9-2ba5-410a-8445-0893a3d1421f" providerId="ADAL" clId="{03CF33AC-D9E4-491F-8963-DAB5E6081A01}" dt="2024-10-09T08:23:15.889" v="66" actId="47"/>
-        <pc:sldMkLst>
-          <pc:docMk/>
-          <pc:sldMk cId="3140181227" sldId="375"/>
-        </pc:sldMkLst>
-      </pc:sldChg>
-      <pc:sldChg chg="add del">
-        <pc:chgData name="Cooling, Chris" userId="6dcf99c9-2ba5-410a-8445-0893a3d1421f" providerId="ADAL" clId="{03CF33AC-D9E4-491F-8963-DAB5E6081A01}" dt="2024-10-09T08:23:15.889" v="66" actId="47"/>
-        <pc:sldMkLst>
-          <pc:docMk/>
-          <pc:sldMk cId="2454815734" sldId="376"/>
-        </pc:sldMkLst>
-      </pc:sldChg>
-      <pc:sldChg chg="addSp delSp modSp add mod modNotesTx">
-        <pc:chgData name="Cooling, Chris" userId="6dcf99c9-2ba5-410a-8445-0893a3d1421f" providerId="ADAL" clId="{03CF33AC-D9E4-491F-8963-DAB5E6081A01}" dt="2024-10-09T13:04:02.494" v="2567" actId="20577"/>
-        <pc:sldMkLst>
-          <pc:docMk/>
-          <pc:sldMk cId="3847659151" sldId="376"/>
-        </pc:sldMkLst>
-      </pc:sldChg>
-      <pc:sldChg chg="addSp delSp modSp add mod ord modNotesTx">
-        <pc:chgData name="Cooling, Chris" userId="6dcf99c9-2ba5-410a-8445-0893a3d1421f" providerId="ADAL" clId="{03CF33AC-D9E4-491F-8963-DAB5E6081A01}" dt="2024-10-09T13:09:12.741" v="2832" actId="20577"/>
-        <pc:sldMkLst>
-          <pc:docMk/>
-          <pc:sldMk cId="2673447316" sldId="377"/>
-        </pc:sldMkLst>
-      </pc:sldChg>
-      <pc:sldChg chg="modSp add del mod">
-        <pc:chgData name="Cooling, Chris" userId="6dcf99c9-2ba5-410a-8445-0893a3d1421f" providerId="ADAL" clId="{03CF33AC-D9E4-491F-8963-DAB5E6081A01}" dt="2024-10-09T08:23:15.889" v="66" actId="47"/>
-        <pc:sldMkLst>
-          <pc:docMk/>
-          <pc:sldMk cId="2849987525" sldId="377"/>
-        </pc:sldMkLst>
-      </pc:sldChg>
-      <pc:sldChg chg="add del">
-        <pc:chgData name="Cooling, Chris" userId="6dcf99c9-2ba5-410a-8445-0893a3d1421f" providerId="ADAL" clId="{03CF33AC-D9E4-491F-8963-DAB5E6081A01}" dt="2024-10-09T08:23:15.889" v="66" actId="47"/>
-        <pc:sldMkLst>
-          <pc:docMk/>
-          <pc:sldMk cId="3102632955" sldId="378"/>
-        </pc:sldMkLst>
-      </pc:sldChg>
-      <pc:sldChg chg="addSp delSp modSp add mod modNotesTx">
-        <pc:chgData name="Cooling, Chris" userId="6dcf99c9-2ba5-410a-8445-0893a3d1421f" providerId="ADAL" clId="{03CF33AC-D9E4-491F-8963-DAB5E6081A01}" dt="2024-10-09T13:10:48.793" v="2858" actId="20577"/>
-        <pc:sldMkLst>
-          <pc:docMk/>
-          <pc:sldMk cId="3995649870" sldId="378"/>
-        </pc:sldMkLst>
-      </pc:sldChg>
-      <pc:sldChg chg="addSp delSp modSp add mod modNotesTx">
-        <pc:chgData name="Cooling, Chris" userId="6dcf99c9-2ba5-410a-8445-0893a3d1421f" providerId="ADAL" clId="{03CF33AC-D9E4-491F-8963-DAB5E6081A01}" dt="2024-10-09T09:22:04.273" v="1354"/>
-        <pc:sldMkLst>
-          <pc:docMk/>
-          <pc:sldMk cId="606499370" sldId="379"/>
-        </pc:sldMkLst>
-      </pc:sldChg>
-      <pc:sldChg chg="add del">
-        <pc:chgData name="Cooling, Chris" userId="6dcf99c9-2ba5-410a-8445-0893a3d1421f" providerId="ADAL" clId="{03CF33AC-D9E4-491F-8963-DAB5E6081A01}" dt="2024-10-09T08:23:15.889" v="66" actId="47"/>
-        <pc:sldMkLst>
-          <pc:docMk/>
-          <pc:sldMk cId="3778418652" sldId="379"/>
-        </pc:sldMkLst>
-      </pc:sldChg>
-      <pc:sldChg chg="addSp delSp modSp add mod modNotesTx">
-        <pc:chgData name="Cooling, Chris" userId="6dcf99c9-2ba5-410a-8445-0893a3d1421f" providerId="ADAL" clId="{03CF33AC-D9E4-491F-8963-DAB5E6081A01}" dt="2024-10-09T13:13:04.394" v="2917" actId="20577"/>
-        <pc:sldMkLst>
-          <pc:docMk/>
-          <pc:sldMk cId="534930278" sldId="380"/>
-        </pc:sldMkLst>
-      </pc:sldChg>
-      <pc:sldChg chg="add del">
-        <pc:chgData name="Cooling, Chris" userId="6dcf99c9-2ba5-410a-8445-0893a3d1421f" providerId="ADAL" clId="{03CF33AC-D9E4-491F-8963-DAB5E6081A01}" dt="2024-10-09T08:23:15.889" v="66" actId="47"/>
-        <pc:sldMkLst>
-          <pc:docMk/>
-          <pc:sldMk cId="2599389758" sldId="380"/>
-        </pc:sldMkLst>
-      </pc:sldChg>
-      <pc:sldChg chg="addSp delSp modSp add mod modNotesTx">
-        <pc:chgData name="Cooling, Chris" userId="6dcf99c9-2ba5-410a-8445-0893a3d1421f" providerId="ADAL" clId="{03CF33AC-D9E4-491F-8963-DAB5E6081A01}" dt="2024-10-09T13:13:45.608" v="2938" actId="20577"/>
-        <pc:sldMkLst>
-          <pc:docMk/>
-          <pc:sldMk cId="2605189886" sldId="381"/>
-        </pc:sldMkLst>
-      </pc:sldChg>
-      <pc:sldChg chg="add del">
-        <pc:chgData name="Cooling, Chris" userId="6dcf99c9-2ba5-410a-8445-0893a3d1421f" providerId="ADAL" clId="{03CF33AC-D9E4-491F-8963-DAB5E6081A01}" dt="2024-10-09T08:23:15.889" v="66" actId="47"/>
-        <pc:sldMkLst>
-          <pc:docMk/>
-          <pc:sldMk cId="2798413230" sldId="381"/>
-        </pc:sldMkLst>
-      </pc:sldChg>
-      <pc:sldChg chg="modSp add del mod">
-        <pc:chgData name="Cooling, Chris" userId="6dcf99c9-2ba5-410a-8445-0893a3d1421f" providerId="ADAL" clId="{03CF33AC-D9E4-491F-8963-DAB5E6081A01}" dt="2024-10-09T08:23:15.889" v="66" actId="47"/>
-        <pc:sldMkLst>
-          <pc:docMk/>
-          <pc:sldMk cId="3357951532" sldId="382"/>
-        </pc:sldMkLst>
-      </pc:sldChg>
-      <pc:sldChg chg="delSp modSp add mod modNotesTx">
-        <pc:chgData name="Cooling, Chris" userId="6dcf99c9-2ba5-410a-8445-0893a3d1421f" providerId="ADAL" clId="{03CF33AC-D9E4-491F-8963-DAB5E6081A01}" dt="2024-10-09T09:35:08.883" v="1424" actId="20577"/>
-        <pc:sldMkLst>
-          <pc:docMk/>
-          <pc:sldMk cId="3637714125" sldId="382"/>
-        </pc:sldMkLst>
-      </pc:sldChg>
-      <pc:sldChg chg="add del">
-        <pc:chgData name="Cooling, Chris" userId="6dcf99c9-2ba5-410a-8445-0893a3d1421f" providerId="ADAL" clId="{03CF33AC-D9E4-491F-8963-DAB5E6081A01}" dt="2024-10-09T08:23:15.889" v="66" actId="47"/>
-        <pc:sldMkLst>
-          <pc:docMk/>
-          <pc:sldMk cId="453738133" sldId="383"/>
-        </pc:sldMkLst>
-      </pc:sldChg>
-      <pc:sldChg chg="modSp add mod modNotesTx">
-        <pc:chgData name="Cooling, Chris" userId="6dcf99c9-2ba5-410a-8445-0893a3d1421f" providerId="ADAL" clId="{03CF33AC-D9E4-491F-8963-DAB5E6081A01}" dt="2024-10-09T09:37:24.718" v="1436"/>
-        <pc:sldMkLst>
-          <pc:docMk/>
-          <pc:sldMk cId="1793681033" sldId="383"/>
-        </pc:sldMkLst>
-      </pc:sldChg>
-      <pc:sldChg chg="add del">
-        <pc:chgData name="Cooling, Chris" userId="6dcf99c9-2ba5-410a-8445-0893a3d1421f" providerId="ADAL" clId="{03CF33AC-D9E4-491F-8963-DAB5E6081A01}" dt="2024-10-09T08:23:15.889" v="66" actId="47"/>
-        <pc:sldMkLst>
-          <pc:docMk/>
-          <pc:sldMk cId="57580663" sldId="384"/>
-        </pc:sldMkLst>
-      </pc:sldChg>
-      <pc:sldChg chg="addSp modSp add mod modNotesTx">
-        <pc:chgData name="Cooling, Chris" userId="6dcf99c9-2ba5-410a-8445-0893a3d1421f" providerId="ADAL" clId="{03CF33AC-D9E4-491F-8963-DAB5E6081A01}" dt="2024-10-09T13:15:06.706" v="2993" actId="20577"/>
-        <pc:sldMkLst>
-          <pc:docMk/>
-          <pc:sldMk cId="170370874" sldId="384"/>
-        </pc:sldMkLst>
-      </pc:sldChg>
-      <pc:sldChg chg="add del">
-        <pc:chgData name="Cooling, Chris" userId="6dcf99c9-2ba5-410a-8445-0893a3d1421f" providerId="ADAL" clId="{03CF33AC-D9E4-491F-8963-DAB5E6081A01}" dt="2024-10-09T08:23:15.889" v="66" actId="47"/>
-        <pc:sldMkLst>
-          <pc:docMk/>
-          <pc:sldMk cId="2487598261" sldId="385"/>
-        </pc:sldMkLst>
-      </pc:sldChg>
-      <pc:sldChg chg="addSp modSp add mod modNotesTx">
-        <pc:chgData name="Cooling, Chris" userId="6dcf99c9-2ba5-410a-8445-0893a3d1421f" providerId="ADAL" clId="{03CF33AC-D9E4-491F-8963-DAB5E6081A01}" dt="2024-10-09T13:15:40.487" v="3006" actId="33524"/>
-        <pc:sldMkLst>
-          <pc:docMk/>
-          <pc:sldMk cId="3374749885" sldId="385"/>
-        </pc:sldMkLst>
-      </pc:sldChg>
-      <pc:sldChg chg="modSp add del mod">
-        <pc:chgData name="Cooling, Chris" userId="6dcf99c9-2ba5-410a-8445-0893a3d1421f" providerId="ADAL" clId="{03CF33AC-D9E4-491F-8963-DAB5E6081A01}" dt="2024-10-09T08:23:15.889" v="66" actId="47"/>
-        <pc:sldMkLst>
-          <pc:docMk/>
-          <pc:sldMk cId="3173781080" sldId="386"/>
-        </pc:sldMkLst>
-      </pc:sldChg>
-      <pc:sldChg chg="delSp modSp add mod modNotesTx">
-        <pc:chgData name="Cooling, Chris" userId="6dcf99c9-2ba5-410a-8445-0893a3d1421f" providerId="ADAL" clId="{03CF33AC-D9E4-491F-8963-DAB5E6081A01}" dt="2024-10-09T13:16:33.468" v="3050" actId="478"/>
-        <pc:sldMkLst>
-          <pc:docMk/>
-          <pc:sldMk cId="3981322899" sldId="386"/>
-        </pc:sldMkLst>
-      </pc:sldChg>
-      <pc:sldChg chg="modSp add del mod">
-        <pc:chgData name="Cooling, Chris" userId="6dcf99c9-2ba5-410a-8445-0893a3d1421f" providerId="ADAL" clId="{03CF33AC-D9E4-491F-8963-DAB5E6081A01}" dt="2024-10-09T08:23:15.889" v="66" actId="47"/>
-        <pc:sldMkLst>
-          <pc:docMk/>
-          <pc:sldMk cId="1390760873" sldId="387"/>
-        </pc:sldMkLst>
-      </pc:sldChg>
-      <pc:sldChg chg="addSp modSp add mod modNotesTx">
-        <pc:chgData name="Cooling, Chris" userId="6dcf99c9-2ba5-410a-8445-0893a3d1421f" providerId="ADAL" clId="{03CF33AC-D9E4-491F-8963-DAB5E6081A01}" dt="2024-10-09T13:17:06.658" v="3109" actId="20577"/>
-        <pc:sldMkLst>
-          <pc:docMk/>
-          <pc:sldMk cId="2197734974" sldId="387"/>
-        </pc:sldMkLst>
-      </pc:sldChg>
-      <pc:sldChg chg="delSp modSp add mod modNotesTx">
-        <pc:chgData name="Cooling, Chris" userId="6dcf99c9-2ba5-410a-8445-0893a3d1421f" providerId="ADAL" clId="{03CF33AC-D9E4-491F-8963-DAB5E6081A01}" dt="2024-10-09T09:49:11.307" v="1482" actId="478"/>
-        <pc:sldMkLst>
-          <pc:docMk/>
-          <pc:sldMk cId="3191437002" sldId="388"/>
-        </pc:sldMkLst>
-      </pc:sldChg>
-      <pc:sldChg chg="add del">
-        <pc:chgData name="Cooling, Chris" userId="6dcf99c9-2ba5-410a-8445-0893a3d1421f" providerId="ADAL" clId="{03CF33AC-D9E4-491F-8963-DAB5E6081A01}" dt="2024-10-09T08:23:15.889" v="66" actId="47"/>
-        <pc:sldMkLst>
-          <pc:docMk/>
-          <pc:sldMk cId="3749303348" sldId="388"/>
-        </pc:sldMkLst>
-      </pc:sldChg>
-      <pc:sldChg chg="add del">
-        <pc:chgData name="Cooling, Chris" userId="6dcf99c9-2ba5-410a-8445-0893a3d1421f" providerId="ADAL" clId="{03CF33AC-D9E4-491F-8963-DAB5E6081A01}" dt="2024-10-09T08:23:15.889" v="66" actId="47"/>
-        <pc:sldMkLst>
-          <pc:docMk/>
-          <pc:sldMk cId="933885824" sldId="389"/>
-        </pc:sldMkLst>
-      </pc:sldChg>
-      <pc:sldChg chg="addSp delSp modSp add mod ord modNotesTx">
-        <pc:chgData name="Cooling, Chris" userId="6dcf99c9-2ba5-410a-8445-0893a3d1421f" providerId="ADAL" clId="{03CF33AC-D9E4-491F-8963-DAB5E6081A01}" dt="2024-10-09T13:23:17.221" v="3126" actId="20577"/>
-        <pc:sldMkLst>
-          <pc:docMk/>
-          <pc:sldMk cId="3717795031" sldId="389"/>
-        </pc:sldMkLst>
-      </pc:sldChg>
-      <pc:sldChg chg="add del">
-        <pc:chgData name="Cooling, Chris" userId="6dcf99c9-2ba5-410a-8445-0893a3d1421f" providerId="ADAL" clId="{03CF33AC-D9E4-491F-8963-DAB5E6081A01}" dt="2024-10-09T08:23:15.889" v="66" actId="47"/>
-        <pc:sldMkLst>
-          <pc:docMk/>
-          <pc:sldMk cId="1654254681" sldId="390"/>
-        </pc:sldMkLst>
-      </pc:sldChg>
-      <pc:sldChg chg="addSp delSp modSp add mod modNotesTx">
-        <pc:chgData name="Cooling, Chris" userId="6dcf99c9-2ba5-410a-8445-0893a3d1421f" providerId="ADAL" clId="{03CF33AC-D9E4-491F-8963-DAB5E6081A01}" dt="2024-10-09T13:24:16.791" v="3180" actId="20577"/>
-        <pc:sldMkLst>
-          <pc:docMk/>
-          <pc:sldMk cId="2876155974" sldId="390"/>
-        </pc:sldMkLst>
-      </pc:sldChg>
-      <pc:sldChg chg="add del">
-        <pc:chgData name="Cooling, Chris" userId="6dcf99c9-2ba5-410a-8445-0893a3d1421f" providerId="ADAL" clId="{03CF33AC-D9E4-491F-8963-DAB5E6081A01}" dt="2024-10-09T08:23:15.889" v="66" actId="47"/>
-        <pc:sldMkLst>
-          <pc:docMk/>
-          <pc:sldMk cId="2312507278" sldId="391"/>
-        </pc:sldMkLst>
-      </pc:sldChg>
-      <pc:sldChg chg="delSp modSp add mod modNotesTx">
-        <pc:chgData name="Cooling, Chris" userId="6dcf99c9-2ba5-410a-8445-0893a3d1421f" providerId="ADAL" clId="{03CF33AC-D9E4-491F-8963-DAB5E6081A01}" dt="2024-10-09T09:55:58.085" v="1520" actId="20577"/>
-        <pc:sldMkLst>
-          <pc:docMk/>
-          <pc:sldMk cId="3530089354" sldId="391"/>
-        </pc:sldMkLst>
-      </pc:sldChg>
-      <pc:sldChg chg="modSp add del mod">
-        <pc:chgData name="Cooling, Chris" userId="6dcf99c9-2ba5-410a-8445-0893a3d1421f" providerId="ADAL" clId="{03CF33AC-D9E4-491F-8963-DAB5E6081A01}" dt="2024-10-09T08:23:15.889" v="66" actId="47"/>
-        <pc:sldMkLst>
-          <pc:docMk/>
-          <pc:sldMk cId="2539671263" sldId="392"/>
-        </pc:sldMkLst>
-      </pc:sldChg>
-      <pc:sldChg chg="modSp add mod modNotesTx">
-        <pc:chgData name="Cooling, Chris" userId="6dcf99c9-2ba5-410a-8445-0893a3d1421f" providerId="ADAL" clId="{03CF33AC-D9E4-491F-8963-DAB5E6081A01}" dt="2024-10-09T09:56:53.580" v="1526"/>
-        <pc:sldMkLst>
-          <pc:docMk/>
-          <pc:sldMk cId="3446637373" sldId="392"/>
-        </pc:sldMkLst>
-      </pc:sldChg>
-      <pc:sldChg chg="addSp modSp add mod modNotesTx">
-        <pc:chgData name="Cooling, Chris" userId="6dcf99c9-2ba5-410a-8445-0893a3d1421f" providerId="ADAL" clId="{03CF33AC-D9E4-491F-8963-DAB5E6081A01}" dt="2024-10-09T10:00:18.203" v="1538"/>
+        <pc:chgData name="Cooling, Chris" userId="6dcf99c9-2ba5-410a-8445-0893a3d1421f" providerId="ADAL" clId="{0564427D-CD1D-4B33-9C97-2A8069F97102}" dt="2026-05-29T10:54:56.157" v="16" actId="20577"/>
         <pc:sldMkLst>
           <pc:docMk/>
           <pc:sldMk cId="620213683" sldId="393"/>
         </pc:sldMkLst>
+        <pc:spChg chg="mod">
+          <ac:chgData name="Cooling, Chris" userId="6dcf99c9-2ba5-410a-8445-0893a3d1421f" providerId="ADAL" clId="{0564427D-CD1D-4B33-9C97-2A8069F97102}" dt="2026-05-29T10:54:56.157" v="16" actId="20577"/>
+          <ac:spMkLst>
+            <pc:docMk/>
+            <pc:sldMk cId="620213683" sldId="393"/>
+            <ac:spMk id="3" creationId="{2C7A6954-5AE7-6E35-86E6-C550777AAF6E}"/>
+          </ac:spMkLst>
+        </pc:spChg>
       </pc:sldChg>
-      <pc:sldChg chg="add del">
-        <pc:chgData name="Cooling, Chris" userId="6dcf99c9-2ba5-410a-8445-0893a3d1421f" providerId="ADAL" clId="{03CF33AC-D9E4-491F-8963-DAB5E6081A01}" dt="2024-10-09T08:23:15.889" v="66" actId="47"/>
-        <pc:sldMkLst>
-          <pc:docMk/>
-          <pc:sldMk cId="3744006074" sldId="393"/>
-        </pc:sldMkLst>
-      </pc:sldChg>
-      <pc:sldChg chg="add del">
-        <pc:chgData name="Cooling, Chris" userId="6dcf99c9-2ba5-410a-8445-0893a3d1421f" providerId="ADAL" clId="{03CF33AC-D9E4-491F-8963-DAB5E6081A01}" dt="2024-10-09T08:23:15.889" v="66" actId="47"/>
-        <pc:sldMkLst>
-          <pc:docMk/>
-          <pc:sldMk cId="1378110722" sldId="394"/>
-        </pc:sldMkLst>
-      </pc:sldChg>
-      <pc:sldChg chg="addSp delSp modSp add mod modNotesTx">
-        <pc:chgData name="Cooling, Chris" userId="6dcf99c9-2ba5-410a-8445-0893a3d1421f" providerId="ADAL" clId="{03CF33AC-D9E4-491F-8963-DAB5E6081A01}" dt="2024-10-09T13:25:26.979" v="3256" actId="20577"/>
-        <pc:sldMkLst>
-          <pc:docMk/>
-          <pc:sldMk cId="2690902426" sldId="394"/>
-        </pc:sldMkLst>
-      </pc:sldChg>
-      <pc:sldChg chg="addSp delSp modSp add mod modNotesTx">
-        <pc:chgData name="Cooling, Chris" userId="6dcf99c9-2ba5-410a-8445-0893a3d1421f" providerId="ADAL" clId="{03CF33AC-D9E4-491F-8963-DAB5E6081A01}" dt="2024-10-09T10:15:49.750" v="1568"/>
-        <pc:sldMkLst>
-          <pc:docMk/>
-          <pc:sldMk cId="3761449199" sldId="395"/>
-        </pc:sldMkLst>
-      </pc:sldChg>
-      <pc:sldChg chg="add del">
-        <pc:chgData name="Cooling, Chris" userId="6dcf99c9-2ba5-410a-8445-0893a3d1421f" providerId="ADAL" clId="{03CF33AC-D9E4-491F-8963-DAB5E6081A01}" dt="2024-10-09T08:23:15.889" v="66" actId="47"/>
-        <pc:sldMkLst>
-          <pc:docMk/>
-          <pc:sldMk cId="3968020684" sldId="395"/>
-        </pc:sldMkLst>
-      </pc:sldChg>
-      <pc:sldChg chg="add del">
-        <pc:chgData name="Cooling, Chris" userId="6dcf99c9-2ba5-410a-8445-0893a3d1421f" providerId="ADAL" clId="{03CF33AC-D9E4-491F-8963-DAB5E6081A01}" dt="2024-10-09T08:23:15.889" v="66" actId="47"/>
-        <pc:sldMkLst>
-          <pc:docMk/>
-          <pc:sldMk cId="3897677485" sldId="396"/>
-        </pc:sldMkLst>
-      </pc:sldChg>
-      <pc:sldChg chg="addSp delSp modSp add mod modNotesTx">
-        <pc:chgData name="Cooling, Chris" userId="6dcf99c9-2ba5-410a-8445-0893a3d1421f" providerId="ADAL" clId="{03CF33AC-D9E4-491F-8963-DAB5E6081A01}" dt="2024-10-09T10:17:23.395" v="1578"/>
+      <pc:sldChg chg="modSp mod">
+        <pc:chgData name="Cooling, Chris" userId="6dcf99c9-2ba5-410a-8445-0893a3d1421f" providerId="ADAL" clId="{0564427D-CD1D-4B33-9C97-2A8069F97102}" dt="2026-05-29T10:54:48.771" v="15" actId="20577"/>
         <pc:sldMkLst>
           <pc:docMk/>
           <pc:sldMk cId="4103524331" sldId="396"/>
         </pc:sldMkLst>
+        <pc:spChg chg="mod">
+          <ac:chgData name="Cooling, Chris" userId="6dcf99c9-2ba5-410a-8445-0893a3d1421f" providerId="ADAL" clId="{0564427D-CD1D-4B33-9C97-2A8069F97102}" dt="2026-05-29T10:54:48.771" v="15" actId="20577"/>
+          <ac:spMkLst>
+            <pc:docMk/>
+            <pc:sldMk cId="4103524331" sldId="396"/>
+            <ac:spMk id="9" creationId="{74665D48-6B86-2775-C338-4B0E135D3E0F}"/>
+          </ac:spMkLst>
+        </pc:spChg>
       </pc:sldChg>
-      <pc:sldChg chg="addSp delSp modSp add mod modNotesTx">
-        <pc:chgData name="Cooling, Chris" userId="6dcf99c9-2ba5-410a-8445-0893a3d1421f" providerId="ADAL" clId="{03CF33AC-D9E4-491F-8963-DAB5E6081A01}" dt="2024-10-09T13:27:00.884" v="3315" actId="20577"/>
-        <pc:sldMkLst>
-          <pc:docMk/>
-          <pc:sldMk cId="719251142" sldId="397"/>
-        </pc:sldMkLst>
-      </pc:sldChg>
-      <pc:sldChg chg="add del">
-        <pc:chgData name="Cooling, Chris" userId="6dcf99c9-2ba5-410a-8445-0893a3d1421f" providerId="ADAL" clId="{03CF33AC-D9E4-491F-8963-DAB5E6081A01}" dt="2024-10-09T08:23:15.889" v="66" actId="47"/>
-        <pc:sldMkLst>
-          <pc:docMk/>
-          <pc:sldMk cId="2040837939" sldId="397"/>
-        </pc:sldMkLst>
-      </pc:sldChg>
-      <pc:sldChg chg="add del">
-        <pc:chgData name="Cooling, Chris" userId="6dcf99c9-2ba5-410a-8445-0893a3d1421f" providerId="ADAL" clId="{03CF33AC-D9E4-491F-8963-DAB5E6081A01}" dt="2024-10-09T08:23:15.889" v="66" actId="47"/>
-        <pc:sldMkLst>
-          <pc:docMk/>
-          <pc:sldMk cId="813487936" sldId="398"/>
-        </pc:sldMkLst>
-      </pc:sldChg>
-      <pc:sldChg chg="delSp modSp add mod modNotesTx">
-        <pc:chgData name="Cooling, Chris" userId="6dcf99c9-2ba5-410a-8445-0893a3d1421f" providerId="ADAL" clId="{03CF33AC-D9E4-491F-8963-DAB5E6081A01}" dt="2024-10-09T13:27:28.173" v="3335" actId="20577"/>
+      <pc:sldChg chg="modSp mod">
+        <pc:chgData name="Cooling, Chris" userId="6dcf99c9-2ba5-410a-8445-0893a3d1421f" providerId="ADAL" clId="{0564427D-CD1D-4B33-9C97-2A8069F97102}" dt="2026-05-29T10:54:37.211" v="13" actId="20577"/>
         <pc:sldMkLst>
           <pc:docMk/>
           <pc:sldMk cId="3921319063" sldId="398"/>
         </pc:sldMkLst>
+        <pc:spChg chg="mod">
+          <ac:chgData name="Cooling, Chris" userId="6dcf99c9-2ba5-410a-8445-0893a3d1421f" providerId="ADAL" clId="{0564427D-CD1D-4B33-9C97-2A8069F97102}" dt="2026-05-29T10:54:37.211" v="13" actId="20577"/>
+          <ac:spMkLst>
+            <pc:docMk/>
+            <pc:sldMk cId="3921319063" sldId="398"/>
+            <ac:spMk id="8" creationId="{5EFFB270-A444-4DE2-0DE3-DF516468DA9F}"/>
+          </ac:spMkLst>
+        </pc:spChg>
       </pc:sldChg>
-      <pc:sldChg chg="modSp add mod modNotesTx">
-        <pc:chgData name="Cooling, Chris" userId="6dcf99c9-2ba5-410a-8445-0893a3d1421f" providerId="ADAL" clId="{03CF33AC-D9E4-491F-8963-DAB5E6081A01}" dt="2024-10-09T13:28:06.093" v="3368" actId="20577"/>
+      <pc:sldChg chg="modSp mod">
+        <pc:chgData name="Cooling, Chris" userId="6dcf99c9-2ba5-410a-8445-0893a3d1421f" providerId="ADAL" clId="{0564427D-CD1D-4B33-9C97-2A8069F97102}" dt="2026-05-29T10:54:20.902" v="5" actId="20577"/>
         <pc:sldMkLst>
           <pc:docMk/>
           <pc:sldMk cId="3172791869" sldId="399"/>
         </pc:sldMkLst>
-      </pc:sldChg>
-      <pc:sldChg chg="add del">
-        <pc:chgData name="Cooling, Chris" userId="6dcf99c9-2ba5-410a-8445-0893a3d1421f" providerId="ADAL" clId="{03CF33AC-D9E4-491F-8963-DAB5E6081A01}" dt="2024-10-09T08:23:15.889" v="66" actId="47"/>
-        <pc:sldMkLst>
-          <pc:docMk/>
-          <pc:sldMk cId="3835658580" sldId="399"/>
-        </pc:sldMkLst>
-      </pc:sldChg>
-      <pc:sldChg chg="add del">
-        <pc:chgData name="Cooling, Chris" userId="6dcf99c9-2ba5-410a-8445-0893a3d1421f" providerId="ADAL" clId="{03CF33AC-D9E4-491F-8963-DAB5E6081A01}" dt="2024-10-09T08:23:15.889" v="66" actId="47"/>
-        <pc:sldMkLst>
-          <pc:docMk/>
-          <pc:sldMk cId="200963720" sldId="400"/>
-        </pc:sldMkLst>
-      </pc:sldChg>
-      <pc:sldChg chg="addSp delSp modSp add mod modNotesTx">
-        <pc:chgData name="Cooling, Chris" userId="6dcf99c9-2ba5-410a-8445-0893a3d1421f" providerId="ADAL" clId="{03CF33AC-D9E4-491F-8963-DAB5E6081A01}" dt="2024-10-09T13:28:20.633" v="3369" actId="20577"/>
-        <pc:sldMkLst>
-          <pc:docMk/>
-          <pc:sldMk cId="1135729167" sldId="400"/>
-        </pc:sldMkLst>
-      </pc:sldChg>
-      <pc:sldChg chg="addSp delSp modSp add mod modNotesTx">
-        <pc:chgData name="Cooling, Chris" userId="6dcf99c9-2ba5-410a-8445-0893a3d1421f" providerId="ADAL" clId="{03CF33AC-D9E4-491F-8963-DAB5E6081A01}" dt="2024-10-09T13:29:10.393" v="3444"/>
-        <pc:sldMkLst>
-          <pc:docMk/>
-          <pc:sldMk cId="737553104" sldId="401"/>
-        </pc:sldMkLst>
-      </pc:sldChg>
-      <pc:sldChg chg="add del">
-        <pc:chgData name="Cooling, Chris" userId="6dcf99c9-2ba5-410a-8445-0893a3d1421f" providerId="ADAL" clId="{03CF33AC-D9E4-491F-8963-DAB5E6081A01}" dt="2024-10-09T08:23:15.889" v="66" actId="47"/>
-        <pc:sldMkLst>
-          <pc:docMk/>
-          <pc:sldMk cId="3162482540" sldId="401"/>
-        </pc:sldMkLst>
-      </pc:sldChg>
-      <pc:sldChg chg="add del">
-        <pc:chgData name="Cooling, Chris" userId="6dcf99c9-2ba5-410a-8445-0893a3d1421f" providerId="ADAL" clId="{03CF33AC-D9E4-491F-8963-DAB5E6081A01}" dt="2024-10-09T08:23:15.889" v="66" actId="47"/>
-        <pc:sldMkLst>
-          <pc:docMk/>
-          <pc:sldMk cId="265627358" sldId="402"/>
-        </pc:sldMkLst>
-      </pc:sldChg>
-      <pc:sldChg chg="addSp delSp modSp add mod modNotesTx">
-        <pc:chgData name="Cooling, Chris" userId="6dcf99c9-2ba5-410a-8445-0893a3d1421f" providerId="ADAL" clId="{03CF33AC-D9E4-491F-8963-DAB5E6081A01}" dt="2024-10-09T13:29:25.192" v="3482" actId="20577"/>
-        <pc:sldMkLst>
-          <pc:docMk/>
-          <pc:sldMk cId="4021068231" sldId="402"/>
-        </pc:sldMkLst>
-      </pc:sldChg>
-      <pc:sldChg chg="addSp delSp modSp add mod modNotesTx">
-        <pc:chgData name="Cooling, Chris" userId="6dcf99c9-2ba5-410a-8445-0893a3d1421f" providerId="ADAL" clId="{03CF33AC-D9E4-491F-8963-DAB5E6081A01}" dt="2024-10-09T13:30:57.286" v="3600" actId="20577"/>
-        <pc:sldMkLst>
-          <pc:docMk/>
-          <pc:sldMk cId="2500301249" sldId="403"/>
-        </pc:sldMkLst>
-      </pc:sldChg>
-      <pc:sldChg chg="add del">
-        <pc:chgData name="Cooling, Chris" userId="6dcf99c9-2ba5-410a-8445-0893a3d1421f" providerId="ADAL" clId="{03CF33AC-D9E4-491F-8963-DAB5E6081A01}" dt="2024-10-09T08:23:15.889" v="66" actId="47"/>
-        <pc:sldMkLst>
-          <pc:docMk/>
-          <pc:sldMk cId="3716300829" sldId="403"/>
-        </pc:sldMkLst>
-      </pc:sldChg>
-      <pc:sldChg chg="delSp modSp add mod modNotesTx">
-        <pc:chgData name="Cooling, Chris" userId="6dcf99c9-2ba5-410a-8445-0893a3d1421f" providerId="ADAL" clId="{03CF33AC-D9E4-491F-8963-DAB5E6081A01}" dt="2024-10-09T13:31:44.605" v="3695" actId="20577"/>
-        <pc:sldMkLst>
-          <pc:docMk/>
-          <pc:sldMk cId="1407877688" sldId="404"/>
-        </pc:sldMkLst>
-      </pc:sldChg>
-      <pc:sldChg chg="add del">
-        <pc:chgData name="Cooling, Chris" userId="6dcf99c9-2ba5-410a-8445-0893a3d1421f" providerId="ADAL" clId="{03CF33AC-D9E4-491F-8963-DAB5E6081A01}" dt="2024-10-09T08:23:15.889" v="66" actId="47"/>
-        <pc:sldMkLst>
-          <pc:docMk/>
-          <pc:sldMk cId="1971978791" sldId="404"/>
-        </pc:sldMkLst>
-      </pc:sldChg>
-      <pc:sldChg chg="addSp delSp modSp add mod modNotesTx">
-        <pc:chgData name="Cooling, Chris" userId="6dcf99c9-2ba5-410a-8445-0893a3d1421f" providerId="ADAL" clId="{03CF33AC-D9E4-491F-8963-DAB5E6081A01}" dt="2024-10-09T13:12:34.409" v="2863" actId="20577"/>
-        <pc:sldMkLst>
-          <pc:docMk/>
-          <pc:sldMk cId="1607320822" sldId="405"/>
-        </pc:sldMkLst>
-      </pc:sldChg>
-      <pc:sldChg chg="add del">
-        <pc:chgData name="Cooling, Chris" userId="6dcf99c9-2ba5-410a-8445-0893a3d1421f" providerId="ADAL" clId="{03CF33AC-D9E4-491F-8963-DAB5E6081A01}" dt="2024-10-09T08:23:15.889" v="66" actId="47"/>
-        <pc:sldMkLst>
-          <pc:docMk/>
-          <pc:sldMk cId="2646455873" sldId="405"/>
-        </pc:sldMkLst>
-      </pc:sldChg>
-      <pc:sldChg chg="add del">
-        <pc:chgData name="Cooling, Chris" userId="6dcf99c9-2ba5-410a-8445-0893a3d1421f" providerId="ADAL" clId="{03CF33AC-D9E4-491F-8963-DAB5E6081A01}" dt="2024-10-09T08:23:15.889" v="66" actId="47"/>
-        <pc:sldMkLst>
-          <pc:docMk/>
-          <pc:sldMk cId="721358061" sldId="406"/>
-        </pc:sldMkLst>
-      </pc:sldChg>
-      <pc:sldChg chg="add modNotesTx">
-        <pc:chgData name="Cooling, Chris" userId="6dcf99c9-2ba5-410a-8445-0893a3d1421f" providerId="ADAL" clId="{03CF33AC-D9E4-491F-8963-DAB5E6081A01}" dt="2024-10-11T11:01:46.006" v="3749" actId="20577"/>
-        <pc:sldMkLst>
-          <pc:docMk/>
-          <pc:sldMk cId="3543295302" sldId="406"/>
-        </pc:sldMkLst>
-      </pc:sldChg>
-      <pc:sldChg chg="add del">
-        <pc:chgData name="Cooling, Chris" userId="6dcf99c9-2ba5-410a-8445-0893a3d1421f" providerId="ADAL" clId="{03CF33AC-D9E4-491F-8963-DAB5E6081A01}" dt="2024-10-09T08:23:15.889" v="66" actId="47"/>
-        <pc:sldMkLst>
-          <pc:docMk/>
-          <pc:sldMk cId="2899337003" sldId="407"/>
-        </pc:sldMkLst>
-      </pc:sldChg>
-      <pc:sldChg chg="delSp modSp add mod">
-        <pc:chgData name="Cooling, Chris" userId="6dcf99c9-2ba5-410a-8445-0893a3d1421f" providerId="ADAL" clId="{03CF33AC-D9E4-491F-8963-DAB5E6081A01}" dt="2024-10-16T09:09:29.452" v="4301" actId="20577"/>
-        <pc:sldMkLst>
-          <pc:docMk/>
-          <pc:sldMk cId="4288594215" sldId="407"/>
-        </pc:sldMkLst>
-      </pc:sldChg>
-      <pc:sldChg chg="add del">
-        <pc:chgData name="Cooling, Chris" userId="6dcf99c9-2ba5-410a-8445-0893a3d1421f" providerId="ADAL" clId="{03CF33AC-D9E4-491F-8963-DAB5E6081A01}" dt="2024-10-09T08:23:15.889" v="66" actId="47"/>
-        <pc:sldMkLst>
-          <pc:docMk/>
-          <pc:sldMk cId="3099411356" sldId="408"/>
-        </pc:sldMkLst>
-      </pc:sldChg>
-      <pc:sldChg chg="add del">
-        <pc:chgData name="Cooling, Chris" userId="6dcf99c9-2ba5-410a-8445-0893a3d1421f" providerId="ADAL" clId="{03CF33AC-D9E4-491F-8963-DAB5E6081A01}" dt="2024-10-09T08:23:15.889" v="66" actId="47"/>
-        <pc:sldMkLst>
-          <pc:docMk/>
-          <pc:sldMk cId="1839592679" sldId="409"/>
-        </pc:sldMkLst>
-      </pc:sldChg>
-      <pc:sldChg chg="modSp add del mod">
-        <pc:chgData name="Cooling, Chris" userId="6dcf99c9-2ba5-410a-8445-0893a3d1421f" providerId="ADAL" clId="{03CF33AC-D9E4-491F-8963-DAB5E6081A01}" dt="2024-10-09T08:23:15.889" v="66" actId="47"/>
-        <pc:sldMkLst>
-          <pc:docMk/>
-          <pc:sldMk cId="466020703" sldId="410"/>
-        </pc:sldMkLst>
-      </pc:sldChg>
-      <pc:sldChg chg="add del">
-        <pc:chgData name="Cooling, Chris" userId="6dcf99c9-2ba5-410a-8445-0893a3d1421f" providerId="ADAL" clId="{03CF33AC-D9E4-491F-8963-DAB5E6081A01}" dt="2024-10-09T08:23:15.889" v="66" actId="47"/>
-        <pc:sldMkLst>
-          <pc:docMk/>
-          <pc:sldMk cId="3649744382" sldId="411"/>
-        </pc:sldMkLst>
-      </pc:sldChg>
-      <pc:sldMasterChg chg="addSldLayout delSldLayout">
-        <pc:chgData name="Cooling, Chris" userId="6dcf99c9-2ba5-410a-8445-0893a3d1421f" providerId="ADAL" clId="{03CF33AC-D9E4-491F-8963-DAB5E6081A01}" dt="2024-10-09T08:23:15.889" v="66" actId="47"/>
-        <pc:sldMasterMkLst>
-          <pc:docMk/>
-          <pc:sldMasterMk cId="1145082161" sldId="2147483648"/>
-        </pc:sldMasterMkLst>
-        <pc:sldLayoutChg chg="add del">
-          <pc:chgData name="Cooling, Chris" userId="6dcf99c9-2ba5-410a-8445-0893a3d1421f" providerId="ADAL" clId="{03CF33AC-D9E4-491F-8963-DAB5E6081A01}" dt="2024-10-09T08:20:45.443" v="54" actId="47"/>
-          <pc:sldLayoutMkLst>
-            <pc:docMk/>
-            <pc:sldMasterMk cId="1145082161" sldId="2147483648"/>
-            <pc:sldLayoutMk cId="655195816" sldId="2147483725"/>
-          </pc:sldLayoutMkLst>
-        </pc:sldLayoutChg>
-        <pc:sldLayoutChg chg="del">
-          <pc:chgData name="Cooling, Chris" userId="6dcf99c9-2ba5-410a-8445-0893a3d1421f" providerId="ADAL" clId="{03CF33AC-D9E4-491F-8963-DAB5E6081A01}" dt="2024-10-09T08:21:13.232" v="55" actId="47"/>
-          <pc:sldLayoutMkLst>
-            <pc:docMk/>
-            <pc:sldMasterMk cId="1145082161" sldId="2147483648"/>
-            <pc:sldLayoutMk cId="729105091" sldId="2147483725"/>
-          </pc:sldLayoutMkLst>
-        </pc:sldLayoutChg>
-        <pc:sldLayoutChg chg="add">
-          <pc:chgData name="Cooling, Chris" userId="6dcf99c9-2ba5-410a-8445-0893a3d1421f" providerId="ADAL" clId="{03CF33AC-D9E4-491F-8963-DAB5E6081A01}" dt="2024-10-09T08:22:55.145" v="56" actId="27028"/>
-          <pc:sldLayoutMkLst>
-            <pc:docMk/>
-            <pc:sldMasterMk cId="1145082161" sldId="2147483648"/>
-            <pc:sldLayoutMk cId="2709431729" sldId="2147483725"/>
-          </pc:sldLayoutMkLst>
-        </pc:sldLayoutChg>
-        <pc:sldLayoutChg chg="add replId">
-          <pc:chgData name="Cooling, Chris" userId="6dcf99c9-2ba5-410a-8445-0893a3d1421f" providerId="ADAL" clId="{03CF33AC-D9E4-491F-8963-DAB5E6081A01}" dt="2024-10-09T08:22:55.145" v="56" actId="27028"/>
-          <pc:sldLayoutMkLst>
-            <pc:docMk/>
-            <pc:sldMasterMk cId="1145082161" sldId="2147483648"/>
-            <pc:sldLayoutMk cId="3934438464" sldId="2147483726"/>
-          </pc:sldLayoutMkLst>
-        </pc:sldLayoutChg>
-        <pc:sldLayoutChg chg="add del replId">
-          <pc:chgData name="Cooling, Chris" userId="6dcf99c9-2ba5-410a-8445-0893a3d1421f" providerId="ADAL" clId="{03CF33AC-D9E4-491F-8963-DAB5E6081A01}" dt="2024-10-09T08:23:15.889" v="66" actId="47"/>
-          <pc:sldLayoutMkLst>
-            <pc:docMk/>
-            <pc:sldMasterMk cId="1145082161" sldId="2147483648"/>
-            <pc:sldLayoutMk cId="1631762903" sldId="2147483727"/>
-          </pc:sldLayoutMkLst>
-        </pc:sldLayoutChg>
-      </pc:sldMasterChg>
-    </pc:docChg>
-  </pc:docChgLst>
-  <pc:docChgLst>
-    <pc:chgData name="Cooling, Chris" userId="6dcf99c9-2ba5-410a-8445-0893a3d1421f" providerId="ADAL" clId="{F87168F7-E426-4E0C-B927-43E350A0E028}"/>
-    <pc:docChg chg="custSel delSld modSld">
-      <pc:chgData name="Cooling, Chris" userId="6dcf99c9-2ba5-410a-8445-0893a3d1421f" providerId="ADAL" clId="{F87168F7-E426-4E0C-B927-43E350A0E028}" dt="2025-10-24T10:05:43.864" v="10" actId="47"/>
-      <pc:docMkLst>
-        <pc:docMk/>
-      </pc:docMkLst>
-      <pc:sldChg chg="del">
-        <pc:chgData name="Cooling, Chris" userId="6dcf99c9-2ba5-410a-8445-0893a3d1421f" providerId="ADAL" clId="{F87168F7-E426-4E0C-B927-43E350A0E028}" dt="2025-10-24T10:05:43.864" v="10" actId="47"/>
-        <pc:sldMkLst>
-          <pc:docMk/>
-          <pc:sldMk cId="1031427888" sldId="276"/>
-        </pc:sldMkLst>
-      </pc:sldChg>
-      <pc:sldChg chg="addSp delSp modSp mod">
-        <pc:chgData name="Cooling, Chris" userId="6dcf99c9-2ba5-410a-8445-0893a3d1421f" providerId="ADAL" clId="{F87168F7-E426-4E0C-B927-43E350A0E028}" dt="2025-10-24T08:50:32.637" v="9" actId="20577"/>
-        <pc:sldMkLst>
-          <pc:docMk/>
-          <pc:sldMk cId="1507190070" sldId="359"/>
-        </pc:sldMkLst>
         <pc:spChg chg="mod">
-          <ac:chgData name="Cooling, Chris" userId="6dcf99c9-2ba5-410a-8445-0893a3d1421f" providerId="ADAL" clId="{F87168F7-E426-4E0C-B927-43E350A0E028}" dt="2025-10-24T08:50:32.637" v="9" actId="20577"/>
+          <ac:chgData name="Cooling, Chris" userId="6dcf99c9-2ba5-410a-8445-0893a3d1421f" providerId="ADAL" clId="{0564427D-CD1D-4B33-9C97-2A8069F97102}" dt="2026-05-29T10:54:20.902" v="5" actId="20577"/>
           <ac:spMkLst>
             <pc:docMk/>
-            <pc:sldMk cId="1507190070" sldId="359"/>
-            <ac:spMk id="6" creationId="{F67B57BE-29B8-B7BA-15CB-930F83F6EB26}"/>
+            <pc:sldMk cId="3172791869" sldId="399"/>
+            <ac:spMk id="8" creationId="{5EFFB270-A444-4DE2-0DE3-DF516468DA9F}"/>
           </ac:spMkLst>
         </pc:spChg>
-        <pc:picChg chg="add mod">
-          <ac:chgData name="Cooling, Chris" userId="6dcf99c9-2ba5-410a-8445-0893a3d1421f" providerId="ADAL" clId="{F87168F7-E426-4E0C-B927-43E350A0E028}" dt="2025-10-16T13:13:13.697" v="5" actId="1076"/>
-          <ac:picMkLst>
-            <pc:docMk/>
-            <pc:sldMk cId="1507190070" sldId="359"/>
-            <ac:picMk id="10" creationId="{AEABC408-700F-4CEB-9570-F86C4BB6F36F}"/>
-          </ac:picMkLst>
-        </pc:picChg>
-      </pc:sldChg>
-    </pc:docChg>
-  </pc:docChgLst>
-  <pc:docChgLst>
-    <pc:chgData name="Cooling, Chris" userId="6dcf99c9-2ba5-410a-8445-0893a3d1421f" providerId="ADAL" clId="{8B056995-F4C1-4D7A-8F02-845F0BFD579F}"/>
-    <pc:docChg chg="addSld delSld modSld">
-      <pc:chgData name="Cooling, Chris" userId="6dcf99c9-2ba5-410a-8445-0893a3d1421f" providerId="ADAL" clId="{8B056995-F4C1-4D7A-8F02-845F0BFD579F}" dt="2025-03-18T09:53:15.901" v="8" actId="47"/>
-      <pc:docMkLst>
-        <pc:docMk/>
-      </pc:docMkLst>
-      <pc:sldChg chg="modSp add mod">
-        <pc:chgData name="Cooling, Chris" userId="6dcf99c9-2ba5-410a-8445-0893a3d1421f" providerId="ADAL" clId="{8B056995-F4C1-4D7A-8F02-845F0BFD579F}" dt="2025-03-18T09:53:07.640" v="7" actId="14100"/>
-        <pc:sldMkLst>
-          <pc:docMk/>
-          <pc:sldMk cId="1031427888" sldId="276"/>
-        </pc:sldMkLst>
-      </pc:sldChg>
-      <pc:sldChg chg="del">
-        <pc:chgData name="Cooling, Chris" userId="6dcf99c9-2ba5-410a-8445-0893a3d1421f" providerId="ADAL" clId="{8B056995-F4C1-4D7A-8F02-845F0BFD579F}" dt="2025-03-18T09:53:15.901" v="8" actId="47"/>
-        <pc:sldMkLst>
-          <pc:docMk/>
-          <pc:sldMk cId="380350440" sldId="326"/>
-        </pc:sldMkLst>
-      </pc:sldChg>
-      <pc:sldChg chg="addSp del mod">
-        <pc:chgData name="Cooling, Chris" userId="6dcf99c9-2ba5-410a-8445-0893a3d1421f" providerId="ADAL" clId="{8B056995-F4C1-4D7A-8F02-845F0BFD579F}" dt="2025-03-18T09:52:52.180" v="3" actId="47"/>
-        <pc:sldMkLst>
-          <pc:docMk/>
-          <pc:sldMk cId="3543295302" sldId="406"/>
-        </pc:sldMkLst>
       </pc:sldChg>
     </pc:docChg>
   </pc:docChgLst>
@@ -1770,7 +334,7 @@
           <a:p>
             <a:fld id="{D2E0D2A8-8F95-47C2-ABE1-A779F5A43C98}" type="datetimeFigureOut">
               <a:rPr lang="en-US" smtClean="0"/>
-              <a:t>10/24/2025</a:t>
+              <a:t>5/29/2026</a:t>
             </a:fld>
             <a:endParaRPr lang="en-US"/>
           </a:p>
@@ -10389,7 +8953,7 @@
           <a:p>
             <a:fld id="{32DA68FE-35E0-4C63-B55D-7E4144F39E69}" type="datetime1">
               <a:rPr lang="en-GB" smtClean="0"/>
-              <a:t>24/10/2025</a:t>
+              <a:t>29/05/2026</a:t>
             </a:fld>
             <a:endParaRPr lang="en-GB"/>
           </a:p>
@@ -10715,7 +9279,7 @@
           <a:p>
             <a:fld id="{ACAE6301-47B1-4E38-A42E-FF88C8E2547E}" type="datetime1">
               <a:rPr lang="en-GB" smtClean="0"/>
-              <a:t>24/10/2025</a:t>
+              <a:t>29/05/2026</a:t>
             </a:fld>
             <a:endParaRPr lang="en-GB"/>
           </a:p>
@@ -11043,7 +9607,7 @@
           <a:p>
             <a:fld id="{60CE9BE8-7102-4F25-9608-875CE36DCE2C}" type="datetime1">
               <a:rPr lang="en-GB" smtClean="0"/>
-              <a:t>24/10/2025</a:t>
+              <a:t>29/05/2026</a:t>
             </a:fld>
             <a:endParaRPr lang="en-GB"/>
           </a:p>
@@ -11419,7 +9983,7 @@
           <a:p>
             <a:fld id="{7FFE0D53-2649-4A6A-B728-0624D2A8C82F}" type="datetime1">
               <a:rPr lang="en-GB" smtClean="0"/>
-              <a:t>24/10/2025</a:t>
+              <a:t>29/05/2026</a:t>
             </a:fld>
             <a:endParaRPr lang="en-GB"/>
           </a:p>
@@ -11802,7 +10366,7 @@
           <a:p>
             <a:fld id="{1E0F9E6D-467C-4E97-B6D3-4AEC11D733E3}" type="datetime1">
               <a:rPr lang="en-GB" smtClean="0"/>
-              <a:t>24/10/2025</a:t>
+              <a:t>29/05/2026</a:t>
             </a:fld>
             <a:endParaRPr lang="en-GB"/>
           </a:p>
@@ -12187,7 +10751,7 @@
           <a:p>
             <a:fld id="{6B814A64-A4A4-4D05-8C32-14D248CB5579}" type="datetime1">
               <a:rPr lang="en-GB" smtClean="0"/>
-              <a:t>24/10/2025</a:t>
+              <a:t>29/05/2026</a:t>
             </a:fld>
             <a:endParaRPr lang="en-GB"/>
           </a:p>
@@ -12414,7 +10978,7 @@
           <a:p>
             <a:fld id="{EF7AD603-E356-462E-8CD3-ACD880ADAC9C}" type="datetime1">
               <a:rPr lang="en-GB" smtClean="0"/>
-              <a:t>24/10/2025</a:t>
+              <a:t>29/05/2026</a:t>
             </a:fld>
             <a:endParaRPr lang="en-GB"/>
           </a:p>
@@ -12912,7 +11476,7 @@
           <a:p>
             <a:fld id="{F2FA34D9-5BC3-49E0-8995-8830C5E40F86}" type="datetime1">
               <a:rPr lang="en-GB" smtClean="0"/>
-              <a:t>24/10/2025</a:t>
+              <a:t>29/05/2026</a:t>
             </a:fld>
             <a:endParaRPr lang="en-GB"/>
           </a:p>
@@ -13412,7 +11976,7 @@
           <a:p>
             <a:fld id="{EA8A7FF5-6086-41FA-A1AC-70237306CE6F}" type="datetime1">
               <a:rPr lang="en-GB" smtClean="0"/>
-              <a:t>24/10/2025</a:t>
+              <a:t>29/05/2026</a:t>
             </a:fld>
             <a:endParaRPr lang="en-GB"/>
           </a:p>
@@ -13902,7 +12466,7 @@
           <a:p>
             <a:fld id="{B357A878-FC9F-4066-9AC7-68B8CF7A61B8}" type="datetime1">
               <a:rPr lang="en-GB" smtClean="0"/>
-              <a:t>24/10/2025</a:t>
+              <a:t>29/05/2026</a:t>
             </a:fld>
             <a:endParaRPr lang="en-GB"/>
           </a:p>
@@ -14713,7 +13277,7 @@
           <a:p>
             <a:fld id="{4723A53D-0705-4632-B587-1143AC72FBD3}" type="datetime1">
               <a:rPr lang="en-GB" smtClean="0"/>
-              <a:t>24/10/2025</a:t>
+              <a:t>29/05/2026</a:t>
             </a:fld>
             <a:endParaRPr lang="en-GB"/>
           </a:p>
@@ -15330,7 +13894,7 @@
           <a:p>
             <a:fld id="{6816C2BA-1BDF-4758-AF67-EF9ECF794495}" type="datetime1">
               <a:rPr lang="en-GB" smtClean="0"/>
-              <a:t>24/10/2025</a:t>
+              <a:t>29/05/2026</a:t>
             </a:fld>
             <a:endParaRPr lang="en-GB"/>
           </a:p>
@@ -15950,7 +14514,7 @@
           <a:p>
             <a:fld id="{5D5850D4-55A6-48B3-8EBA-06F44CE8ACE0}" type="datetime1">
               <a:rPr lang="en-GB" smtClean="0"/>
-              <a:t>24/10/2025</a:t>
+              <a:t>29/05/2026</a:t>
             </a:fld>
             <a:endParaRPr lang="en-GB"/>
           </a:p>
@@ -16121,7 +14685,7 @@
           <a:p>
             <a:fld id="{8BAE2621-AABD-4469-B26D-59098756F71C}" type="datetime1">
               <a:rPr lang="en-GB" smtClean="0"/>
-              <a:t>24/10/2025</a:t>
+              <a:t>29/05/2026</a:t>
             </a:fld>
             <a:endParaRPr lang="en-GB"/>
           </a:p>
@@ -16294,7 +14858,7 @@
           <a:p>
             <a:fld id="{0877AD66-B699-406C-98B6-C6D40B69B665}" type="datetime1">
               <a:rPr lang="en-GB" smtClean="0"/>
-              <a:t>24/10/2025</a:t>
+              <a:t>29/05/2026</a:t>
             </a:fld>
             <a:endParaRPr lang="en-GB"/>
           </a:p>
@@ -16473,7 +15037,7 @@
           <a:p>
             <a:fld id="{1CBCC50E-5DC9-48F1-BD30-63FFB77F2CB5}" type="datetime1">
               <a:rPr lang="en-GB" smtClean="0"/>
-              <a:t>24/10/2025</a:t>
+              <a:t>29/05/2026</a:t>
             </a:fld>
             <a:endParaRPr lang="en-GB" dirty="0"/>
           </a:p>
@@ -16667,7 +15231,7 @@
           <a:p>
             <a:fld id="{C0140273-5355-4941-A561-FEB1BF7807AA}" type="datetime1">
               <a:rPr lang="en-GB" smtClean="0"/>
-              <a:t>24/10/2025</a:t>
+              <a:t>29/05/2026</a:t>
             </a:fld>
             <a:endParaRPr lang="en-GB" dirty="0"/>
           </a:p>
@@ -16947,7 +15511,7 @@
           <a:p>
             <a:fld id="{FC4D92B1-2CEF-4B06-9391-EDDEEBE2192F}" type="datetime1">
               <a:rPr lang="en-GB" smtClean="0"/>
-              <a:t>24/10/2025</a:t>
+              <a:t>29/05/2026</a:t>
             </a:fld>
             <a:endParaRPr lang="en-GB" dirty="0"/>
           </a:p>
@@ -17228,7 +15792,7 @@
           <a:p>
             <a:fld id="{4A451508-E484-4BE6-BA12-C15123FC5E22}" type="datetime1">
               <a:rPr lang="en-GB" smtClean="0"/>
-              <a:t>24/10/2025</a:t>
+              <a:t>29/05/2026</a:t>
             </a:fld>
             <a:endParaRPr lang="en-GB" dirty="0"/>
           </a:p>
@@ -17508,7 +16072,7 @@
           <a:p>
             <a:fld id="{A68544DF-6A57-4FD8-AE5D-8F7A6A16674B}" type="datetime1">
               <a:rPr lang="en-GB" smtClean="0"/>
-              <a:t>24/10/2025</a:t>
+              <a:t>29/05/2026</a:t>
             </a:fld>
             <a:endParaRPr lang="en-GB" dirty="0"/>
           </a:p>
@@ -17984,7 +16548,7 @@
           <a:p>
             <a:fld id="{0163C9A6-2A3C-4EFB-AB7A-782D179938E9}" type="datetime1">
               <a:rPr lang="en-GB" smtClean="0"/>
-              <a:t>24/10/2025</a:t>
+              <a:t>29/05/2026</a:t>
             </a:fld>
             <a:endParaRPr lang="en-GB" dirty="0"/>
           </a:p>
@@ -18264,7 +16828,7 @@
           <a:p>
             <a:fld id="{51BD37BB-1143-4AD6-A6DE-870C5009A408}" type="datetime1">
               <a:rPr lang="en-GB" smtClean="0"/>
-              <a:t>24/10/2025</a:t>
+              <a:t>29/05/2026</a:t>
             </a:fld>
             <a:endParaRPr lang="en-GB" dirty="0"/>
           </a:p>
@@ -18544,7 +17108,7 @@
           <a:p>
             <a:fld id="{4E3F2BB6-F59A-4765-9282-DEDF930A58E5}" type="datetime1">
               <a:rPr lang="en-GB" smtClean="0"/>
-              <a:t>24/10/2025</a:t>
+              <a:t>29/05/2026</a:t>
             </a:fld>
             <a:endParaRPr lang="en-GB" dirty="0"/>
           </a:p>
@@ -18808,7 +17372,7 @@
           <a:p>
             <a:fld id="{9267B220-D710-480A-9F0E-1B99697D4B76}" type="datetime1">
               <a:rPr lang="en-GB" smtClean="0"/>
-              <a:t>24/10/2025</a:t>
+              <a:t>29/05/2026</a:t>
             </a:fld>
             <a:endParaRPr lang="en-GB"/>
           </a:p>
@@ -19196,7 +17760,7 @@
           <a:p>
             <a:fld id="{463F635F-85CE-48F5-B29E-A69BA01F5913}" type="datetime1">
               <a:rPr lang="en-GB" smtClean="0"/>
-              <a:t>24/10/2025</a:t>
+              <a:t>29/05/2026</a:t>
             </a:fld>
             <a:endParaRPr lang="en-GB"/>
           </a:p>
@@ -19578,7 +18142,7 @@
           <a:p>
             <a:fld id="{3C09A8BF-1C0C-47E0-81BF-29E8EC8A04C0}" type="datetime1">
               <a:rPr lang="en-GB" smtClean="0"/>
-              <a:t>24/10/2025</a:t>
+              <a:t>29/05/2026</a:t>
             </a:fld>
             <a:endParaRPr lang="en-GB"/>
           </a:p>
@@ -19950,7 +18514,7 @@
           <a:p>
             <a:fld id="{75705C4E-C301-49FE-817A-C72B8467D22C}" type="datetime1">
               <a:rPr lang="en-GB" smtClean="0"/>
-              <a:t>24/10/2025</a:t>
+              <a:t>29/05/2026</a:t>
             </a:fld>
             <a:endParaRPr lang="en-GB"/>
           </a:p>
@@ -20357,7 +18921,7 @@
           <a:p>
             <a:fld id="{9D7F5417-1340-4936-893F-33FDA83AB755}" type="datetime1">
               <a:rPr lang="en-GB" smtClean="0"/>
-              <a:t>24/10/2025</a:t>
+              <a:t>29/05/2026</a:t>
             </a:fld>
             <a:endParaRPr lang="en-GB"/>
           </a:p>
@@ -20766,7 +19330,7 @@
           <a:p>
             <a:fld id="{8C2EAA56-45D2-4B0C-BE18-733F5D3F41E1}" type="datetime1">
               <a:rPr lang="en-GB" smtClean="0"/>
-              <a:t>24/10/2025</a:t>
+              <a:t>29/05/2026</a:t>
             </a:fld>
             <a:endParaRPr lang="en-GB"/>
           </a:p>
@@ -21165,7 +19729,7 @@
           <a:p>
             <a:fld id="{F8627E84-3412-4D77-8163-04EB81761086}" type="datetime1">
               <a:rPr lang="en-GB" smtClean="0"/>
-              <a:t>24/10/2025</a:t>
+              <a:t>29/05/2026</a:t>
             </a:fld>
             <a:endParaRPr lang="en-GB"/>
           </a:p>
@@ -21963,7 +20527,7 @@
           <a:p>
             <a:fld id="{E07C0731-B05A-4708-851B-89F1301C65B4}" type="datetime1">
               <a:rPr lang="en-GB" smtClean="0"/>
-              <a:t>24/10/2025</a:t>
+              <a:t>29/05/2026</a:t>
             </a:fld>
             <a:endParaRPr lang="en-GB"/>
           </a:p>
@@ -22567,7 +21131,7 @@
           <a:p>
             <a:fld id="{9C2109FA-7EAB-446C-9425-99916FBF51F8}" type="datetime1">
               <a:rPr lang="en-GB" smtClean="0"/>
-              <a:t>24/10/2025</a:t>
+              <a:t>29/05/2026</a:t>
             </a:fld>
             <a:endParaRPr lang="en-GB"/>
           </a:p>
@@ -23161,7 +21725,7 @@
           <a:p>
             <a:fld id="{404CCB9A-3E6F-4E9E-9D03-9DE0FE512382}" type="datetime1">
               <a:rPr lang="en-GB" smtClean="0"/>
-              <a:t>24/10/2025</a:t>
+              <a:t>29/05/2026</a:t>
             </a:fld>
             <a:endParaRPr lang="en-GB"/>
           </a:p>
@@ -23498,7 +22062,7 @@
           <a:p>
             <a:fld id="{FBF7CCFE-73F6-489F-BB2C-970D664306E2}" type="datetime1">
               <a:rPr lang="en-GB" smtClean="0"/>
-              <a:t>24/10/2025</a:t>
+              <a:t>29/05/2026</a:t>
             </a:fld>
             <a:endParaRPr lang="en-GB"/>
           </a:p>
@@ -23837,7 +22401,7 @@
           <a:p>
             <a:fld id="{0CEBB5BF-8840-4120-8906-E582A74DA247}" type="datetime1">
               <a:rPr lang="en-GB" smtClean="0"/>
-              <a:t>24/10/2025</a:t>
+              <a:t>29/05/2026</a:t>
             </a:fld>
             <a:endParaRPr lang="en-GB"/>
           </a:p>
@@ -24166,7 +22730,7 @@
           <a:p>
             <a:fld id="{5A543189-0BC2-4A91-8403-4CC6A26329C2}" type="datetime1">
               <a:rPr lang="en-GB" smtClean="0"/>
-              <a:t>24/10/2025</a:t>
+              <a:t>29/05/2026</a:t>
             </a:fld>
             <a:endParaRPr lang="en-GB"/>
           </a:p>
@@ -24503,7 +23067,7 @@
           <a:p>
             <a:fld id="{4AD4B7D3-E1EC-48CA-BB38-F3BB3372FA79}" type="datetime1">
               <a:rPr lang="en-GB" smtClean="0"/>
-              <a:t>24/10/2025</a:t>
+              <a:t>29/05/2026</a:t>
             </a:fld>
             <a:endParaRPr lang="en-GB"/>
           </a:p>
@@ -24842,7 +23406,7 @@
           <a:p>
             <a:fld id="{2DA41761-0263-40E9-8B43-FE05F2F266E9}" type="datetime1">
               <a:rPr lang="en-GB" smtClean="0"/>
-              <a:t>24/10/2025</a:t>
+              <a:t>29/05/2026</a:t>
             </a:fld>
             <a:endParaRPr lang="en-GB"/>
           </a:p>
@@ -25171,7 +23735,7 @@
           <a:p>
             <a:fld id="{3FABE1CC-504A-41EA-8A0D-C0C11C5DAE8D}" type="datetime1">
               <a:rPr lang="en-GB" smtClean="0"/>
-              <a:t>24/10/2025</a:t>
+              <a:t>29/05/2026</a:t>
             </a:fld>
             <a:endParaRPr lang="en-GB"/>
           </a:p>
@@ -25409,7 +23973,7 @@
           <a:p>
             <a:fld id="{0B7FF3BA-8A3A-4FF6-8E38-6F0EF3689765}" type="datetime1">
               <a:rPr lang="en-GB" smtClean="0"/>
-              <a:t>24/10/2025</a:t>
+              <a:t>29/05/2026</a:t>
             </a:fld>
             <a:endParaRPr lang="en-GB"/>
           </a:p>
@@ -25845,7 +24409,7 @@
           <a:p>
             <a:fld id="{1C4C0C84-A4AC-4F4E-85D7-49DC96D3608B}" type="datetime1">
               <a:rPr lang="en-GB" smtClean="0"/>
-              <a:t>24/10/2025</a:t>
+              <a:t>29/05/2026</a:t>
             </a:fld>
             <a:endParaRPr lang="en-GB"/>
           </a:p>
@@ -26383,7 +24947,7 @@
           <a:p>
             <a:fld id="{77A567A4-7E6C-4258-A739-CDFE096FE298}" type="datetime1">
               <a:rPr lang="en-GB" smtClean="0"/>
-              <a:t>24/10/2025</a:t>
+              <a:t>29/05/2026</a:t>
             </a:fld>
             <a:endParaRPr lang="en-GB"/>
           </a:p>
@@ -26662,7 +25226,7 @@
           <a:p>
             <a:fld id="{EF267122-F2A0-493F-9503-B91EAC92A4A8}" type="datetime1">
               <a:rPr lang="en-GB" smtClean="0"/>
-              <a:t>24/10/2025</a:t>
+              <a:t>29/05/2026</a:t>
             </a:fld>
             <a:endParaRPr lang="en-GB"/>
           </a:p>
@@ -26947,7 +25511,7 @@
           <a:p>
             <a:fld id="{54C04FEB-BD28-43EB-99B6-C402968411E5}" type="datetime1">
               <a:rPr lang="en-GB" smtClean="0"/>
-              <a:t>24/10/2025</a:t>
+              <a:t>29/05/2026</a:t>
             </a:fld>
             <a:endParaRPr lang="en-GB"/>
           </a:p>
@@ -27240,7 +25804,7 @@
           <a:p>
             <a:fld id="{3FCFA596-EF70-43F5-9709-8482BAFAA7E0}" type="datetime1">
               <a:rPr lang="en-GB" smtClean="0"/>
-              <a:t>24/10/2025</a:t>
+              <a:t>29/05/2026</a:t>
             </a:fld>
             <a:endParaRPr lang="en-GB"/>
           </a:p>
@@ -27657,7 +26221,7 @@
           <a:p>
             <a:fld id="{BCC715E1-D0BB-4D3D-91B7-4007BDA25E50}" type="datetime1">
               <a:rPr lang="en-GB" smtClean="0"/>
-              <a:t>24/10/2025</a:t>
+              <a:t>29/05/2026</a:t>
             </a:fld>
             <a:endParaRPr lang="en-GB" dirty="0"/>
           </a:p>
@@ -28394,7 +26958,7 @@
           <a:p>
             <a:fld id="{4B4BC937-2805-4BE1-9C10-C67D8B6C9243}" type="datetime1">
               <a:rPr lang="en-GB" smtClean="0"/>
-              <a:t>24/10/2025</a:t>
+              <a:t>29/05/2026</a:t>
             </a:fld>
             <a:endParaRPr lang="en-GB"/>
           </a:p>
@@ -28750,7 +27314,7 @@
           <a:p>
             <a:fld id="{4B4BC937-2805-4BE1-9C10-C67D8B6C9243}" type="datetime1">
               <a:rPr lang="en-GB" smtClean="0"/>
-              <a:t>24/10/2025</a:t>
+              <a:t>29/05/2026</a:t>
             </a:fld>
             <a:endParaRPr lang="en-GB"/>
           </a:p>
@@ -29397,7 +27961,7 @@
           <a:p>
             <a:fld id="{4B4BC937-2805-4BE1-9C10-C67D8B6C9243}" type="datetime1">
               <a:rPr lang="en-GB" smtClean="0"/>
-              <a:t>24/10/2025</a:t>
+              <a:t>29/05/2026</a:t>
             </a:fld>
             <a:endParaRPr lang="en-GB"/>
           </a:p>
@@ -29797,7 +28361,7 @@
           <a:p>
             <a:fld id="{4B4BC937-2805-4BE1-9C10-C67D8B6C9243}" type="datetime1">
               <a:rPr lang="en-GB" smtClean="0"/>
-              <a:t>24/10/2025</a:t>
+              <a:t>29/05/2026</a:t>
             </a:fld>
             <a:endParaRPr lang="en-GB"/>
           </a:p>
@@ -30049,7 +28613,7 @@
           <a:p>
             <a:fld id="{4B4BC937-2805-4BE1-9C10-C67D8B6C9243}" type="datetime1">
               <a:rPr lang="en-GB" smtClean="0"/>
-              <a:t>24/10/2025</a:t>
+              <a:t>29/05/2026</a:t>
             </a:fld>
             <a:endParaRPr lang="en-GB"/>
           </a:p>
@@ -30415,7 +28979,7 @@
           <a:p>
             <a:fld id="{4B4BC937-2805-4BE1-9C10-C67D8B6C9243}" type="datetime1">
               <a:rPr lang="en-GB" smtClean="0"/>
-              <a:t>24/10/2025</a:t>
+              <a:t>29/05/2026</a:t>
             </a:fld>
             <a:endParaRPr lang="en-GB"/>
           </a:p>
@@ -30677,7 +29241,7 @@
           <a:p>
             <a:fld id="{4B4BC937-2805-4BE1-9C10-C67D8B6C9243}" type="datetime1">
               <a:rPr lang="en-GB" smtClean="0"/>
-              <a:t>24/10/2025</a:t>
+              <a:t>29/05/2026</a:t>
             </a:fld>
             <a:endParaRPr lang="en-GB"/>
           </a:p>
@@ -30937,7 +29501,7 @@
           <a:p>
             <a:fld id="{4B4BC937-2805-4BE1-9C10-C67D8B6C9243}" type="datetime1">
               <a:rPr lang="en-GB" smtClean="0"/>
-              <a:t>24/10/2025</a:t>
+              <a:t>29/05/2026</a:t>
             </a:fld>
             <a:endParaRPr lang="en-GB"/>
           </a:p>
@@ -31557,7 +30121,7 @@
           <a:p>
             <a:fld id="{4B4BC937-2805-4BE1-9C10-C67D8B6C9243}" type="datetime1">
               <a:rPr lang="en-GB" smtClean="0"/>
-              <a:t>24/10/2025</a:t>
+              <a:t>29/05/2026</a:t>
             </a:fld>
             <a:endParaRPr lang="en-GB"/>
           </a:p>
@@ -32128,7 +30692,7 @@
           <a:p>
             <a:fld id="{4B4BC937-2805-4BE1-9C10-C67D8B6C9243}" type="datetime1">
               <a:rPr lang="en-GB" smtClean="0"/>
-              <a:t>24/10/2025</a:t>
+              <a:t>29/05/2026</a:t>
             </a:fld>
             <a:endParaRPr lang="en-GB"/>
           </a:p>
@@ -33058,7 +31622,7 @@
           <a:p>
             <a:fld id="{17C7E698-6411-43D8-BBAC-7FA3F2F21909}" type="datetime1">
               <a:rPr lang="en-GB" smtClean="0"/>
-              <a:t>24/10/2025</a:t>
+              <a:t>29/05/2026</a:t>
             </a:fld>
             <a:endParaRPr lang="en-GB"/>
           </a:p>
@@ -33228,7 +31792,7 @@
           <a:p>
             <a:fld id="{4B4BC937-2805-4BE1-9C10-C67D8B6C9243}" type="datetime1">
               <a:rPr lang="en-GB" smtClean="0"/>
-              <a:t>24/10/2025</a:t>
+              <a:t>29/05/2026</a:t>
             </a:fld>
             <a:endParaRPr lang="en-GB"/>
           </a:p>
@@ -33505,7 +32069,7 @@
           <a:p>
             <a:fld id="{4B4BC937-2805-4BE1-9C10-C67D8B6C9243}" type="datetime1">
               <a:rPr lang="en-GB" smtClean="0"/>
-              <a:t>24/10/2025</a:t>
+              <a:t>29/05/2026</a:t>
             </a:fld>
             <a:endParaRPr lang="en-GB"/>
           </a:p>
@@ -34418,7 +32982,7 @@
           <a:p>
             <a:fld id="{4B4BC937-2805-4BE1-9C10-C67D8B6C9243}" type="datetime1">
               <a:rPr lang="en-GB" smtClean="0"/>
-              <a:t>24/10/2025</a:t>
+              <a:t>29/05/2026</a:t>
             </a:fld>
             <a:endParaRPr lang="en-GB"/>
           </a:p>
@@ -35519,7 +34083,7 @@
           <a:p>
             <a:fld id="{4B4BC937-2805-4BE1-9C10-C67D8B6C9243}" type="datetime1">
               <a:rPr lang="en-GB" smtClean="0"/>
-              <a:t>24/10/2025</a:t>
+              <a:t>29/05/2026</a:t>
             </a:fld>
             <a:endParaRPr lang="en-GB"/>
           </a:p>
@@ -36434,7 +34998,7 @@
           <a:p>
             <a:fld id="{4B4BC937-2805-4BE1-9C10-C67D8B6C9243}" type="datetime1">
               <a:rPr lang="en-GB" smtClean="0"/>
-              <a:t>24/10/2025</a:t>
+              <a:t>29/05/2026</a:t>
             </a:fld>
             <a:endParaRPr lang="en-GB"/>
           </a:p>
@@ -36882,7 +35446,7 @@
           <a:p>
             <a:fld id="{4B4BC937-2805-4BE1-9C10-C67D8B6C9243}" type="datetime1">
               <a:rPr lang="en-GB" smtClean="0"/>
-              <a:t>24/10/2025</a:t>
+              <a:t>29/05/2026</a:t>
             </a:fld>
             <a:endParaRPr lang="en-GB"/>
           </a:p>
@@ -37174,7 +35738,7 @@
           <a:p>
             <a:fld id="{4B4BC937-2805-4BE1-9C10-C67D8B6C9243}" type="datetime1">
               <a:rPr lang="en-GB" smtClean="0"/>
-              <a:t>24/10/2025</a:t>
+              <a:t>29/05/2026</a:t>
             </a:fld>
             <a:endParaRPr lang="en-GB"/>
           </a:p>
@@ -37450,7 +36014,7 @@
           <a:p>
             <a:fld id="{4B4BC937-2805-4BE1-9C10-C67D8B6C9243}" type="datetime1">
               <a:rPr lang="en-GB" smtClean="0"/>
-              <a:t>24/10/2025</a:t>
+              <a:t>29/05/2026</a:t>
             </a:fld>
             <a:endParaRPr lang="en-GB"/>
           </a:p>
@@ -37774,7 +36338,7 @@
           <a:p>
             <a:fld id="{4B4BC937-2805-4BE1-9C10-C67D8B6C9243}" type="datetime1">
               <a:rPr lang="en-GB" smtClean="0"/>
-              <a:t>24/10/2025</a:t>
+              <a:t>29/05/2026</a:t>
             </a:fld>
             <a:endParaRPr lang="en-GB"/>
           </a:p>
@@ -38096,7 +36660,7 @@
           <a:p>
             <a:fld id="{4B4BC937-2805-4BE1-9C10-C67D8B6C9243}" type="datetime1">
               <a:rPr lang="en-GB" smtClean="0"/>
-              <a:t>24/10/2025</a:t>
+              <a:t>29/05/2026</a:t>
             </a:fld>
             <a:endParaRPr lang="en-GB"/>
           </a:p>
@@ -38428,7 +36992,7 @@
           <a:p>
             <a:fld id="{4B4BC937-2805-4BE1-9C10-C67D8B6C9243}" type="datetime1">
               <a:rPr lang="en-GB" smtClean="0"/>
-              <a:t>24/10/2025</a:t>
+              <a:t>29/05/2026</a:t>
             </a:fld>
             <a:endParaRPr lang="en-GB"/>
           </a:p>
@@ -38597,7 +37161,7 @@
           <a:p>
             <a:fld id="{4B4BC937-2805-4BE1-9C10-C67D8B6C9243}" type="datetime1">
               <a:rPr lang="en-GB" smtClean="0"/>
-              <a:t>24/10/2025</a:t>
+              <a:t>29/05/2026</a:t>
             </a:fld>
             <a:endParaRPr lang="en-GB"/>
           </a:p>
@@ -39025,7 +37589,7 @@
           <a:p>
             <a:fld id="{4B4BC937-2805-4BE1-9C10-C67D8B6C9243}" type="datetime1">
               <a:rPr lang="en-GB" smtClean="0"/>
-              <a:t>24/10/2025</a:t>
+              <a:t>29/05/2026</a:t>
             </a:fld>
             <a:endParaRPr lang="en-GB"/>
           </a:p>
@@ -39281,7 +37845,7 @@
           <a:p>
             <a:fld id="{4B4BC937-2805-4BE1-9C10-C67D8B6C9243}" type="datetime1">
               <a:rPr lang="en-GB" smtClean="0"/>
-              <a:t>24/10/2025</a:t>
+              <a:t>29/05/2026</a:t>
             </a:fld>
             <a:endParaRPr lang="en-GB"/>
           </a:p>
@@ -40047,7 +38611,7 @@
           <a:p>
             <a:fld id="{4B4BC937-2805-4BE1-9C10-C67D8B6C9243}" type="datetime1">
               <a:rPr lang="en-GB" smtClean="0"/>
-              <a:t>24/10/2025</a:t>
+              <a:t>29/05/2026</a:t>
             </a:fld>
             <a:endParaRPr lang="en-GB"/>
           </a:p>
@@ -40618,7 +39182,7 @@
           <a:p>
             <a:fld id="{4B4BC937-2805-4BE1-9C10-C67D8B6C9243}" type="datetime1">
               <a:rPr lang="en-GB" smtClean="0"/>
-              <a:t>24/10/2025</a:t>
+              <a:t>29/05/2026</a:t>
             </a:fld>
             <a:endParaRPr lang="en-GB"/>
           </a:p>
@@ -40866,7 +39430,7 @@
           <a:p>
             <a:fld id="{4B4BC937-2805-4BE1-9C10-C67D8B6C9243}" type="datetime1">
               <a:rPr lang="en-GB" smtClean="0"/>
-              <a:t>24/10/2025</a:t>
+              <a:t>29/05/2026</a:t>
             </a:fld>
             <a:endParaRPr lang="en-GB"/>
           </a:p>
@@ -41094,7 +39658,7 @@
           <a:p>
             <a:fld id="{4B4BC937-2805-4BE1-9C10-C67D8B6C9243}" type="datetime1">
               <a:rPr lang="en-GB" smtClean="0"/>
-              <a:t>24/10/2025</a:t>
+              <a:t>29/05/2026</a:t>
             </a:fld>
             <a:endParaRPr lang="en-GB"/>
           </a:p>
@@ -41338,7 +39902,7 @@
             </a:pPr>
             <a:r>
               <a:rPr lang="en-GB" sz="2800" dirty="0"/>
-              <a:t> </a:t>
+              <a:t> 	</a:t>
             </a:r>
             <a:r>
               <a:rPr lang="en-GB" sz="2800" dirty="0" err="1"/>
@@ -41632,7 +40196,7 @@
           <a:p>
             <a:fld id="{4B4BC937-2805-4BE1-9C10-C67D8B6C9243}" type="datetime1">
               <a:rPr lang="en-GB" smtClean="0"/>
-              <a:t>24/10/2025</a:t>
+              <a:t>29/05/2026</a:t>
             </a:fld>
             <a:endParaRPr lang="en-GB"/>
           </a:p>
@@ -42117,7 +40681,7 @@
           <a:p>
             <a:fld id="{4B4BC937-2805-4BE1-9C10-C67D8B6C9243}" type="datetime1">
               <a:rPr lang="en-GB" smtClean="0"/>
-              <a:t>24/10/2025</a:t>
+              <a:t>29/05/2026</a:t>
             </a:fld>
             <a:endParaRPr lang="en-GB"/>
           </a:p>
@@ -42363,7 +40927,7 @@
           <a:p>
             <a:fld id="{4B4BC937-2805-4BE1-9C10-C67D8B6C9243}" type="datetime1">
               <a:rPr lang="en-GB" smtClean="0"/>
-              <a:t>24/10/2025</a:t>
+              <a:t>29/05/2026</a:t>
             </a:fld>
             <a:endParaRPr lang="en-GB"/>
           </a:p>
@@ -42516,7 +41080,11 @@
               <a:buNone/>
             </a:pPr>
             <a:r>
-              <a:rPr lang="en-GB" sz="2000" dirty="0"/>
+              <a:rPr lang="en-GB" dirty="0">
+                <a:solidFill>
+                  <a:schemeClr val="accent5"/>
+                </a:solidFill>
+              </a:rPr>
               <a:t>	</a:t>
             </a:r>
             <a:r>
@@ -43056,7 +41624,7 @@
           <a:p>
             <a:fld id="{4B4BC937-2805-4BE1-9C10-C67D8B6C9243}" type="datetime1">
               <a:rPr lang="en-GB" smtClean="0"/>
-              <a:t>24/10/2025</a:t>
+              <a:t>29/05/2026</a:t>
             </a:fld>
             <a:endParaRPr lang="en-GB"/>
           </a:p>
@@ -43225,7 +41793,7 @@
           <a:p>
             <a:fld id="{4B4BC937-2805-4BE1-9C10-C67D8B6C9243}" type="datetime1">
               <a:rPr lang="en-GB" smtClean="0"/>
-              <a:t>24/10/2025</a:t>
+              <a:t>29/05/2026</a:t>
             </a:fld>
             <a:endParaRPr lang="en-GB"/>
           </a:p>
@@ -43716,7 +42284,7 @@
           <a:p>
             <a:fld id="{4B4BC937-2805-4BE1-9C10-C67D8B6C9243}" type="datetime1">
               <a:rPr lang="en-GB" smtClean="0"/>
-              <a:t>24/10/2025</a:t>
+              <a:t>29/05/2026</a:t>
             </a:fld>
             <a:endParaRPr lang="en-GB"/>
           </a:p>
@@ -43922,7 +42490,7 @@
             </a:pPr>
             <a:r>
               <a:rPr lang="en-GB" sz="2800" dirty="0"/>
-              <a:t>	  evaluation=</a:t>
+              <a:t>	  	evaluation=</a:t>
             </a:r>
             <a:r>
               <a:rPr lang="en-GB" sz="2800" dirty="0">
@@ -43943,7 +42511,7 @@
                   <a:schemeClr val="accent1"/>
                 </a:solidFill>
               </a:rPr>
-              <a:t>else if</a:t>
+              <a:t>	else if</a:t>
             </a:r>
             <a:r>
               <a:rPr lang="en-GB" sz="2800" dirty="0"/>
@@ -43968,7 +42536,7 @@
             </a:pPr>
             <a:r>
               <a:rPr lang="en-GB" sz="2800" dirty="0"/>
-              <a:t>  evaluation=value*factorial(value-</a:t>
+              <a:t>  		evaluation=value*factorial(value-</a:t>
             </a:r>
             <a:r>
               <a:rPr lang="en-GB" sz="2800" dirty="0">
@@ -43993,7 +42561,7 @@
                   <a:schemeClr val="accent1"/>
                 </a:solidFill>
               </a:rPr>
-              <a:t>else</a:t>
+              <a:t>	else</a:t>
             </a:r>
           </a:p>
           <a:p>
@@ -44006,7 +42574,7 @@
                   <a:schemeClr val="accent1"/>
                 </a:solidFill>
               </a:rPr>
-              <a:t>  stop </a:t>
+              <a:t>  		stop </a:t>
             </a:r>
             <a:r>
               <a:rPr lang="en-GB" sz="2800" dirty="0"/>
@@ -44023,7 +42591,7 @@
                   <a:schemeClr val="accent1"/>
                 </a:solidFill>
               </a:rPr>
-              <a:t>end if</a:t>
+              <a:t>	end if</a:t>
             </a:r>
           </a:p>
           <a:p>
@@ -44179,7 +42747,7 @@
           <a:p>
             <a:fld id="{4B4BC937-2805-4BE1-9C10-C67D8B6C9243}" type="datetime1">
               <a:rPr lang="en-GB" smtClean="0"/>
-              <a:t>24/10/2025</a:t>
+              <a:t>29/05/2026</a:t>
             </a:fld>
             <a:endParaRPr lang="en-GB"/>
           </a:p>
@@ -44320,6 +42888,35 @@
               <a:buNone/>
             </a:pPr>
             <a:r>
+              <a:rPr lang="en-GB" sz="2800" dirty="0">
+                <a:solidFill>
+                  <a:schemeClr val="accent5"/>
+                </a:solidFill>
+              </a:rPr>
+              <a:t>	real</a:t>
+            </a:r>
+            <a:r>
+              <a:rPr lang="en-GB" sz="2800" dirty="0"/>
+              <a:t>, </a:t>
+            </a:r>
+            <a:r>
+              <a:rPr lang="en-GB" sz="2800" dirty="0">
+                <a:solidFill>
+                  <a:schemeClr val="accent5"/>
+                </a:solidFill>
+              </a:rPr>
+              <a:t>dimension</a:t>
+            </a:r>
+            <a:r>
+              <a:rPr lang="en-GB" sz="2800" dirty="0"/>
+              <a:t>(:) 	::  array</a:t>
+            </a:r>
+          </a:p>
+          <a:p>
+            <a:pPr marL="0" indent="0">
+              <a:buNone/>
+            </a:pPr>
+            <a:r>
               <a:rPr lang="en-GB" sz="2800" dirty="0"/>
               <a:t>	</a:t>
             </a:r>
@@ -44333,19 +42930,7 @@
             </a:r>
             <a:r>
               <a:rPr lang="en-GB" sz="2800" dirty="0"/>
-              <a:t>, </a:t>
-            </a:r>
-            <a:r>
-              <a:rPr lang="en-GB" sz="2800" dirty="0">
-                <a:solidFill>
-                  <a:schemeClr val="accent5"/>
-                </a:solidFill>
-              </a:rPr>
-              <a:t>dimension</a:t>
-            </a:r>
-            <a:r>
-              <a:rPr lang="en-GB" sz="2800" dirty="0"/>
-              <a:t>(:) 	::  array</a:t>
+              <a:t>                		::  evaluation</a:t>
             </a:r>
           </a:p>
           <a:p>
@@ -44354,28 +42939,7 @@
             </a:pPr>
             <a:r>
               <a:rPr lang="en-GB" sz="2800" dirty="0"/>
-              <a:t>	</a:t>
-            </a:r>
-            <a:r>
-              <a:rPr lang="en-GB" sz="2800" dirty="0">
-                <a:solidFill>
-                  <a:schemeClr val="accent5"/>
-                </a:solidFill>
-              </a:rPr>
-              <a:t>real</a:t>
-            </a:r>
-            <a:r>
-              <a:rPr lang="en-GB" sz="2800" dirty="0"/>
-              <a:t>                		::  evaluation</a:t>
-            </a:r>
-          </a:p>
-          <a:p>
-            <a:pPr marL="0" indent="0">
-              <a:buNone/>
-            </a:pPr>
-            <a:r>
-              <a:rPr lang="en-GB" sz="2800" dirty="0"/>
-              <a:t>     </a:t>
+              <a:t>     	</a:t>
             </a:r>
             <a:r>
               <a:rPr lang="en-GB" sz="2800" dirty="0">
@@ -44493,7 +43057,7 @@
                   <a:schemeClr val="accent1"/>
                 </a:solidFill>
               </a:rPr>
-              <a:t>end do  </a:t>
+              <a:t>	end do  </a:t>
             </a:r>
             <a:r>
               <a:rPr lang="en-GB" sz="2800" dirty="0"/>
@@ -44663,7 +43227,7 @@
           <a:p>
             <a:fld id="{4B4BC937-2805-4BE1-9C10-C67D8B6C9243}" type="datetime1">
               <a:rPr lang="en-GB" smtClean="0"/>
-              <a:t>24/10/2025</a:t>
+              <a:t>29/05/2026</a:t>
             </a:fld>
             <a:endParaRPr lang="en-GB"/>
           </a:p>
@@ -45492,7 +44056,7 @@
           <a:p>
             <a:fld id="{4B4BC937-2805-4BE1-9C10-C67D8B6C9243}" type="datetime1">
               <a:rPr lang="en-GB" smtClean="0"/>
-              <a:t>24/10/2025</a:t>
+              <a:t>29/05/2026</a:t>
             </a:fld>
             <a:endParaRPr lang="en-GB"/>
           </a:p>
@@ -45983,7 +44547,7 @@
           <a:p>
             <a:fld id="{4B4BC937-2805-4BE1-9C10-C67D8B6C9243}" type="datetime1">
               <a:rPr lang="en-GB" smtClean="0"/>
-              <a:t>24/10/2025</a:t>
+              <a:t>29/05/2026</a:t>
             </a:fld>
             <a:endParaRPr lang="en-GB"/>
           </a:p>
@@ -46689,7 +45253,7 @@
           <a:p>
             <a:fld id="{4B4BC937-2805-4BE1-9C10-C67D8B6C9243}" type="datetime1">
               <a:rPr lang="en-GB" smtClean="0"/>
-              <a:t>24/10/2025</a:t>
+              <a:t>29/05/2026</a:t>
             </a:fld>
             <a:endParaRPr lang="en-GB"/>
           </a:p>
@@ -47018,7 +45582,7 @@
           <a:p>
             <a:fld id="{4B4BC937-2805-4BE1-9C10-C67D8B6C9243}" type="datetime1">
               <a:rPr lang="en-GB" smtClean="0"/>
-              <a:t>24/10/2025</a:t>
+              <a:t>29/05/2026</a:t>
             </a:fld>
             <a:endParaRPr lang="en-GB"/>
           </a:p>
@@ -47304,7 +45868,7 @@
           <a:p>
             <a:fld id="{4B4BC937-2805-4BE1-9C10-C67D8B6C9243}" type="datetime1">
               <a:rPr lang="en-GB" smtClean="0"/>
-              <a:t>24/10/2025</a:t>
+              <a:t>29/05/2026</a:t>
             </a:fld>
             <a:endParaRPr lang="en-GB"/>
           </a:p>
@@ -47631,7 +46195,7 @@
           <a:p>
             <a:fld id="{63896447-BAB6-4DC5-9580-7E3F4D046868}" type="datetime1">
               <a:rPr lang="en-GB" smtClean="0"/>
-              <a:t>24/10/2025</a:t>
+              <a:t>29/05/2026</a:t>
             </a:fld>
             <a:endParaRPr lang="en-GB"/>
           </a:p>
@@ -48040,7 +46604,7 @@
           <a:p>
             <a:fld id="{4B4BC937-2805-4BE1-9C10-C67D8B6C9243}" type="datetime1">
               <a:rPr lang="en-GB" smtClean="0"/>
-              <a:t>24/10/2025</a:t>
+              <a:t>29/05/2026</a:t>
             </a:fld>
             <a:endParaRPr lang="en-GB"/>
           </a:p>
@@ -48395,7 +46959,7 @@
           <a:p>
             <a:fld id="{4B4BC937-2805-4BE1-9C10-C67D8B6C9243}" type="datetime1">
               <a:rPr lang="en-GB" smtClean="0"/>
-              <a:t>24/10/2025</a:t>
+              <a:t>29/05/2026</a:t>
             </a:fld>
             <a:endParaRPr lang="en-GB"/>
           </a:p>
@@ -48611,7 +47175,7 @@
           <a:p>
             <a:fld id="{4B4BC937-2805-4BE1-9C10-C67D8B6C9243}" type="datetime1">
               <a:rPr lang="en-GB" smtClean="0"/>
-              <a:t>24/10/2025</a:t>
+              <a:t>29/05/2026</a:t>
             </a:fld>
             <a:endParaRPr lang="en-GB"/>
           </a:p>
@@ -49177,7 +47741,7 @@
           <a:p>
             <a:fld id="{4B4BC937-2805-4BE1-9C10-C67D8B6C9243}" type="datetime1">
               <a:rPr lang="en-GB" smtClean="0"/>
-              <a:t>24/10/2025</a:t>
+              <a:t>29/05/2026</a:t>
             </a:fld>
             <a:endParaRPr lang="en-GB"/>
           </a:p>
@@ -49436,7 +48000,7 @@
           <a:p>
             <a:fld id="{4B4BC937-2805-4BE1-9C10-C67D8B6C9243}" type="datetime1">
               <a:rPr lang="en-GB" smtClean="0"/>
-              <a:t>24/10/2025</a:t>
+              <a:t>29/05/2026</a:t>
             </a:fld>
             <a:endParaRPr lang="en-GB"/>
           </a:p>
